--- a/2_제안서/기획서/세미프로젝트_웹페이지구조.pptx
+++ b/2_제안서/기획서/세미프로젝트_웹페이지구조.pptx
@@ -22,7 +22,9 @@
     <p:sldId id="288" r:id="rId16"/>
     <p:sldId id="271" r:id="rId17"/>
     <p:sldId id="272" r:id="rId18"/>
-    <p:sldId id="273" r:id="rId19"/>
+    <p:sldId id="295" r:id="rId19"/>
+    <p:sldId id="273" r:id="rId20"/>
+    <p:sldId id="294" r:id="rId21"/>
   </p:sldIdLst>
   <p:sldSz cx="12192000" cy="6858000"/>
   <p:notesSz cx="6858000" cy="9144000"/>
@@ -276,7 +278,7 @@
           <a:p>
             <a:fld id="{96081FB3-AA8B-429D-ABF6-7EDAF8F11967}" type="datetimeFigureOut">
               <a:rPr lang="ko-KR" altLang="en-US" smtClean="0"/>
-              <a:t>2025-02-11</a:t>
+              <a:t>2025-02-13</a:t>
             </a:fld>
             <a:endParaRPr lang="ko-KR" altLang="en-US"/>
           </a:p>
@@ -474,7 +476,7 @@
           <a:p>
             <a:fld id="{96081FB3-AA8B-429D-ABF6-7EDAF8F11967}" type="datetimeFigureOut">
               <a:rPr lang="ko-KR" altLang="en-US" smtClean="0"/>
-              <a:t>2025-02-11</a:t>
+              <a:t>2025-02-13</a:t>
             </a:fld>
             <a:endParaRPr lang="ko-KR" altLang="en-US"/>
           </a:p>
@@ -682,7 +684,7 @@
           <a:p>
             <a:fld id="{96081FB3-AA8B-429D-ABF6-7EDAF8F11967}" type="datetimeFigureOut">
               <a:rPr lang="ko-KR" altLang="en-US" smtClean="0"/>
-              <a:t>2025-02-11</a:t>
+              <a:t>2025-02-13</a:t>
             </a:fld>
             <a:endParaRPr lang="ko-KR" altLang="en-US"/>
           </a:p>
@@ -880,7 +882,7 @@
           <a:p>
             <a:fld id="{96081FB3-AA8B-429D-ABF6-7EDAF8F11967}" type="datetimeFigureOut">
               <a:rPr lang="ko-KR" altLang="en-US" smtClean="0"/>
-              <a:t>2025-02-11</a:t>
+              <a:t>2025-02-13</a:t>
             </a:fld>
             <a:endParaRPr lang="ko-KR" altLang="en-US"/>
           </a:p>
@@ -1155,7 +1157,7 @@
           <a:p>
             <a:fld id="{96081FB3-AA8B-429D-ABF6-7EDAF8F11967}" type="datetimeFigureOut">
               <a:rPr lang="ko-KR" altLang="en-US" smtClean="0"/>
-              <a:t>2025-02-11</a:t>
+              <a:t>2025-02-13</a:t>
             </a:fld>
             <a:endParaRPr lang="ko-KR" altLang="en-US"/>
           </a:p>
@@ -1420,7 +1422,7 @@
           <a:p>
             <a:fld id="{96081FB3-AA8B-429D-ABF6-7EDAF8F11967}" type="datetimeFigureOut">
               <a:rPr lang="ko-KR" altLang="en-US" smtClean="0"/>
-              <a:t>2025-02-11</a:t>
+              <a:t>2025-02-13</a:t>
             </a:fld>
             <a:endParaRPr lang="ko-KR" altLang="en-US"/>
           </a:p>
@@ -1832,7 +1834,7 @@
           <a:p>
             <a:fld id="{96081FB3-AA8B-429D-ABF6-7EDAF8F11967}" type="datetimeFigureOut">
               <a:rPr lang="ko-KR" altLang="en-US" smtClean="0"/>
-              <a:t>2025-02-11</a:t>
+              <a:t>2025-02-13</a:t>
             </a:fld>
             <a:endParaRPr lang="ko-KR" altLang="en-US"/>
           </a:p>
@@ -1973,7 +1975,7 @@
           <a:p>
             <a:fld id="{96081FB3-AA8B-429D-ABF6-7EDAF8F11967}" type="datetimeFigureOut">
               <a:rPr lang="ko-KR" altLang="en-US" smtClean="0"/>
-              <a:t>2025-02-11</a:t>
+              <a:t>2025-02-13</a:t>
             </a:fld>
             <a:endParaRPr lang="ko-KR" altLang="en-US"/>
           </a:p>
@@ -2086,7 +2088,7 @@
           <a:p>
             <a:fld id="{96081FB3-AA8B-429D-ABF6-7EDAF8F11967}" type="datetimeFigureOut">
               <a:rPr lang="ko-KR" altLang="en-US" smtClean="0"/>
-              <a:t>2025-02-11</a:t>
+              <a:t>2025-02-13</a:t>
             </a:fld>
             <a:endParaRPr lang="ko-KR" altLang="en-US"/>
           </a:p>
@@ -2397,7 +2399,7 @@
           <a:p>
             <a:fld id="{96081FB3-AA8B-429D-ABF6-7EDAF8F11967}" type="datetimeFigureOut">
               <a:rPr lang="ko-KR" altLang="en-US" smtClean="0"/>
-              <a:t>2025-02-11</a:t>
+              <a:t>2025-02-13</a:t>
             </a:fld>
             <a:endParaRPr lang="ko-KR" altLang="en-US"/>
           </a:p>
@@ -2685,7 +2687,7 @@
           <a:p>
             <a:fld id="{96081FB3-AA8B-429D-ABF6-7EDAF8F11967}" type="datetimeFigureOut">
               <a:rPr lang="ko-KR" altLang="en-US" smtClean="0"/>
-              <a:t>2025-02-11</a:t>
+              <a:t>2025-02-13</a:t>
             </a:fld>
             <a:endParaRPr lang="ko-KR" altLang="en-US"/>
           </a:p>
@@ -2926,7 +2928,7 @@
           <a:p>
             <a:fld id="{96081FB3-AA8B-429D-ABF6-7EDAF8F11967}" type="datetimeFigureOut">
               <a:rPr lang="ko-KR" altLang="en-US" smtClean="0"/>
-              <a:t>2025-02-11</a:t>
+              <a:t>2025-02-13</a:t>
             </a:fld>
             <a:endParaRPr lang="ko-KR" altLang="en-US"/>
           </a:p>
@@ -16883,11 +16885,17 @@
           <p:cNvGraphicFramePr>
             <a:graphicFrameLocks noGrp="1"/>
           </p:cNvGraphicFramePr>
-          <p:nvPr/>
+          <p:nvPr>
+            <p:extLst>
+              <p:ext uri="{D42A27DB-BD31-4B8C-83A1-F6EECF244321}">
+                <p14:modId xmlns:p14="http://schemas.microsoft.com/office/powerpoint/2010/main" val="806514716"/>
+              </p:ext>
+            </p:extLst>
+          </p:nvPr>
         </p:nvGraphicFramePr>
         <p:xfrm>
-          <a:off x="2592196" y="3019719"/>
-          <a:ext cx="7004810" cy="2926080"/>
+          <a:off x="3111151" y="3094979"/>
+          <a:ext cx="5949814" cy="2329756"/>
         </p:xfrm>
         <a:graphic>
           <a:graphicData uri="http://schemas.openxmlformats.org/drawingml/2006/table">
@@ -16896,64 +16904,36 @@
                 <a:tableStyleId>{5940675A-B579-460E-94D1-54222C63F5DA}</a:tableStyleId>
               </a:tblPr>
               <a:tblGrid>
-                <a:gridCol w="1360366">
+                <a:gridCol w="1105249">
                   <a:extLst>
                     <a:ext uri="{9D8B030D-6E8A-4147-A177-3AD203B41FA5}">
                       <a16:colId xmlns:a16="http://schemas.microsoft.com/office/drawing/2014/main" val="4286597566"/>
                     </a:ext>
                   </a:extLst>
                 </a:gridCol>
-                <a:gridCol w="491987">
+                <a:gridCol w="711200">
                   <a:extLst>
                     <a:ext uri="{9D8B030D-6E8A-4147-A177-3AD203B41FA5}">
                       <a16:colId xmlns:a16="http://schemas.microsoft.com/office/drawing/2014/main" val="437229603"/>
                     </a:ext>
                   </a:extLst>
                 </a:gridCol>
-                <a:gridCol w="858743">
+                <a:gridCol w="2702107">
                   <a:extLst>
                     <a:ext uri="{9D8B030D-6E8A-4147-A177-3AD203B41FA5}">
                       <a16:colId xmlns:a16="http://schemas.microsoft.com/office/drawing/2014/main" val="4146858838"/>
                     </a:ext>
                   </a:extLst>
                 </a:gridCol>
-                <a:gridCol w="858743">
+                <a:gridCol w="1431258">
                   <a:extLst>
                     <a:ext uri="{9D8B030D-6E8A-4147-A177-3AD203B41FA5}">
                       <a16:colId xmlns:a16="http://schemas.microsoft.com/office/drawing/2014/main" val="695159410"/>
                     </a:ext>
                   </a:extLst>
                 </a:gridCol>
-                <a:gridCol w="858743">
-                  <a:extLst>
-                    <a:ext uri="{9D8B030D-6E8A-4147-A177-3AD203B41FA5}">
-                      <a16:colId xmlns:a16="http://schemas.microsoft.com/office/drawing/2014/main" val="1428081890"/>
-                    </a:ext>
-                  </a:extLst>
-                </a:gridCol>
-                <a:gridCol w="579646">
-                  <a:extLst>
-                    <a:ext uri="{9D8B030D-6E8A-4147-A177-3AD203B41FA5}">
-                      <a16:colId xmlns:a16="http://schemas.microsoft.com/office/drawing/2014/main" val="2699763539"/>
-                    </a:ext>
-                  </a:extLst>
-                </a:gridCol>
-                <a:gridCol w="956347">
-                  <a:extLst>
-                    <a:ext uri="{9D8B030D-6E8A-4147-A177-3AD203B41FA5}">
-                      <a16:colId xmlns:a16="http://schemas.microsoft.com/office/drawing/2014/main" val="2299268585"/>
-                    </a:ext>
-                  </a:extLst>
-                </a:gridCol>
-                <a:gridCol w="1040235">
-                  <a:extLst>
-                    <a:ext uri="{9D8B030D-6E8A-4147-A177-3AD203B41FA5}">
-                      <a16:colId xmlns:a16="http://schemas.microsoft.com/office/drawing/2014/main" val="1640740984"/>
-                    </a:ext>
-                  </a:extLst>
-                </a:gridCol>
               </a:tblGrid>
-              <a:tr h="330130">
+              <a:tr h="286261">
                 <a:tc>
                   <a:txBody>
                     <a:bodyPr/>
@@ -17005,63 +16985,7 @@
                       <a:pPr latinLnBrk="1"/>
                       <a:r>
                         <a:rPr lang="ko-KR" altLang="en-US" dirty="0"/>
-                        <a:t>정</a:t>
-                      </a:r>
-                    </a:p>
-                  </a:txBody>
-                  <a:tcPr/>
-                </a:tc>
-                <a:tc>
-                  <a:txBody>
-                    <a:bodyPr/>
-                    <a:lstStyle/>
-                    <a:p>
-                      <a:pPr latinLnBrk="1"/>
-                      <a:r>
-                        <a:rPr lang="ko-KR" altLang="en-US" dirty="0"/>
-                        <a:t>보</a:t>
-                      </a:r>
-                    </a:p>
-                  </a:txBody>
-                  <a:tcPr/>
-                </a:tc>
-                <a:tc>
-                  <a:txBody>
-                    <a:bodyPr/>
-                    <a:lstStyle/>
-                    <a:p>
-                      <a:pPr latinLnBrk="1"/>
-                      <a:r>
-                        <a:rPr lang="ko-KR" altLang="en-US" dirty="0"/>
-                        <a:t>들</a:t>
-                      </a:r>
-                    </a:p>
-                  </a:txBody>
-                  <a:tcPr/>
-                </a:tc>
-                <a:tc>
-                  <a:txBody>
-                    <a:bodyPr/>
-                    <a:lstStyle/>
-                    <a:p>
-                      <a:pPr latinLnBrk="1"/>
-                      <a:r>
-                        <a:rPr lang="ko-KR" altLang="en-US" dirty="0"/>
                         <a:t>비고</a:t>
-                      </a:r>
-                    </a:p>
-                  </a:txBody>
-                  <a:tcPr/>
-                </a:tc>
-                <a:tc>
-                  <a:txBody>
-                    <a:bodyPr/>
-                    <a:lstStyle/>
-                    <a:p>
-                      <a:pPr latinLnBrk="1"/>
-                      <a:r>
-                        <a:rPr lang="ko-KR" altLang="en-US" dirty="0"/>
-                        <a:t>활성화</a:t>
                       </a:r>
                     </a:p>
                   </a:txBody>
@@ -17073,29 +16997,7 @@
                   </a:ext>
                 </a:extLst>
               </a:tr>
-              <a:tr h="330130">
-                <a:tc>
-                  <a:txBody>
-                    <a:bodyPr/>
-                    <a:lstStyle/>
-                    <a:p>
-                      <a:pPr latinLnBrk="1"/>
-                      <a:endParaRPr lang="ko-KR" altLang="en-US"/>
-                    </a:p>
-                  </a:txBody>
-                  <a:tcPr/>
-                </a:tc>
-                <a:tc>
-                  <a:txBody>
-                    <a:bodyPr/>
-                    <a:lstStyle/>
-                    <a:p>
-                      <a:pPr latinLnBrk="1"/>
-                      <a:endParaRPr lang="ko-KR" altLang="en-US"/>
-                    </a:p>
-                  </a:txBody>
-                  <a:tcPr/>
-                </a:tc>
+              <a:tr h="500956">
                 <a:tc>
                   <a:txBody>
                     <a:bodyPr/>
@@ -17124,29 +17026,14 @@
                     <a:lstStyle/>
                     <a:p>
                       <a:pPr latinLnBrk="1"/>
-                      <a:endParaRPr lang="ko-KR" altLang="en-US" dirty="0"/>
-                    </a:p>
-                  </a:txBody>
-                  <a:tcPr/>
-                </a:tc>
-                <a:tc>
-                  <a:txBody>
-                    <a:bodyPr/>
-                    <a:lstStyle/>
-                    <a:p>
-                      <a:pPr latinLnBrk="1"/>
-                      <a:endParaRPr lang="ko-KR" altLang="en-US" dirty="0"/>
-                    </a:p>
-                  </a:txBody>
-                  <a:tcPr/>
-                </a:tc>
-                <a:tc>
-                  <a:txBody>
-                    <a:bodyPr/>
-                    <a:lstStyle/>
-                    <a:p>
-                      <a:pPr latinLnBrk="1"/>
-                      <a:endParaRPr lang="ko-KR" altLang="en-US" dirty="0"/>
+                      <a:r>
+                        <a:rPr lang="ko-KR" altLang="en-US" dirty="0" err="1"/>
+                        <a:t>클릭시</a:t>
+                      </a:r>
+                      <a:r>
+                        <a:rPr lang="ko-KR" altLang="en-US" dirty="0"/>
+                        <a:t> 세부정보창 오픈</a:t>
+                      </a:r>
                     </a:p>
                   </a:txBody>
                   <a:tcPr/>
@@ -17168,7 +17055,7 @@
                   </a:ext>
                 </a:extLst>
               </a:tr>
-              <a:tr h="330130">
+              <a:tr h="286261">
                 <a:tc>
                   <a:txBody>
                     <a:bodyPr/>
@@ -17213,13 +17100,20 @@
                   </a:txBody>
                   <a:tcPr/>
                 </a:tc>
+                <a:extLst>
+                  <a:ext uri="{0D108BD9-81ED-4DB2-BD59-A6C34878D82A}">
+                    <a16:rowId xmlns:a16="http://schemas.microsoft.com/office/drawing/2014/main" val="3568295167"/>
+                  </a:ext>
+                </a:extLst>
+              </a:tr>
+              <a:tr h="286261">
                 <a:tc>
                   <a:txBody>
                     <a:bodyPr/>
                     <a:lstStyle/>
                     <a:p>
                       <a:pPr latinLnBrk="1"/>
-                      <a:endParaRPr lang="ko-KR" altLang="en-US" dirty="0"/>
+                      <a:endParaRPr lang="ko-KR" altLang="en-US"/>
                     </a:p>
                   </a:txBody>
                   <a:tcPr/>
@@ -17241,7 +17135,7 @@
                     <a:lstStyle/>
                     <a:p>
                       <a:pPr latinLnBrk="1"/>
-                      <a:endParaRPr lang="ko-KR" altLang="en-US" dirty="0"/>
+                      <a:endParaRPr lang="ko-KR" altLang="en-US"/>
                     </a:p>
                   </a:txBody>
                   <a:tcPr/>
@@ -17259,11 +17153,11 @@
                 </a:tc>
                 <a:extLst>
                   <a:ext uri="{0D108BD9-81ED-4DB2-BD59-A6C34878D82A}">
-                    <a16:rowId xmlns:a16="http://schemas.microsoft.com/office/drawing/2014/main" val="3568295167"/>
+                    <a16:rowId xmlns:a16="http://schemas.microsoft.com/office/drawing/2014/main" val="3196313567"/>
                   </a:ext>
                 </a:extLst>
               </a:tr>
-              <a:tr h="330130">
+              <a:tr h="286261">
                 <a:tc>
                   <a:txBody>
                     <a:bodyPr/>
@@ -17308,57 +17202,13 @@
                   </a:txBody>
                   <a:tcPr/>
                 </a:tc>
-                <a:tc>
-                  <a:txBody>
-                    <a:bodyPr/>
-                    <a:lstStyle/>
-                    <a:p>
-                      <a:pPr latinLnBrk="1"/>
-                      <a:endParaRPr lang="ko-KR" altLang="en-US" dirty="0"/>
-                    </a:p>
-                  </a:txBody>
-                  <a:tcPr/>
-                </a:tc>
-                <a:tc>
-                  <a:txBody>
-                    <a:bodyPr/>
-                    <a:lstStyle/>
-                    <a:p>
-                      <a:pPr latinLnBrk="1"/>
-                      <a:endParaRPr lang="ko-KR" altLang="en-US" dirty="0"/>
-                    </a:p>
-                  </a:txBody>
-                  <a:tcPr/>
-                </a:tc>
-                <a:tc>
-                  <a:txBody>
-                    <a:bodyPr/>
-                    <a:lstStyle/>
-                    <a:p>
-                      <a:pPr latinLnBrk="1"/>
-                      <a:endParaRPr lang="ko-KR" altLang="en-US" dirty="0"/>
-                    </a:p>
-                  </a:txBody>
-                  <a:tcPr/>
-                </a:tc>
-                <a:tc>
-                  <a:txBody>
-                    <a:bodyPr/>
-                    <a:lstStyle/>
-                    <a:p>
-                      <a:pPr latinLnBrk="1"/>
-                      <a:endParaRPr lang="ko-KR" altLang="en-US" dirty="0"/>
-                    </a:p>
-                  </a:txBody>
-                  <a:tcPr/>
-                </a:tc>
                 <a:extLst>
                   <a:ext uri="{0D108BD9-81ED-4DB2-BD59-A6C34878D82A}">
-                    <a16:rowId xmlns:a16="http://schemas.microsoft.com/office/drawing/2014/main" val="3196313567"/>
+                    <a16:rowId xmlns:a16="http://schemas.microsoft.com/office/drawing/2014/main" val="1869686725"/>
                   </a:ext>
                 </a:extLst>
               </a:tr>
-              <a:tr h="330130">
+              <a:tr h="286261">
                 <a:tc>
                   <a:txBody>
                     <a:bodyPr/>
@@ -17403,338 +17253,9 @@
                   </a:txBody>
                   <a:tcPr/>
                 </a:tc>
-                <a:tc>
-                  <a:txBody>
-                    <a:bodyPr/>
-                    <a:lstStyle/>
-                    <a:p>
-                      <a:pPr latinLnBrk="1"/>
-                      <a:endParaRPr lang="ko-KR" altLang="en-US" dirty="0"/>
-                    </a:p>
-                  </a:txBody>
-                  <a:tcPr/>
-                </a:tc>
-                <a:tc>
-                  <a:txBody>
-                    <a:bodyPr/>
-                    <a:lstStyle/>
-                    <a:p>
-                      <a:pPr latinLnBrk="1"/>
-                      <a:endParaRPr lang="ko-KR" altLang="en-US" dirty="0"/>
-                    </a:p>
-                  </a:txBody>
-                  <a:tcPr/>
-                </a:tc>
-                <a:tc>
-                  <a:txBody>
-                    <a:bodyPr/>
-                    <a:lstStyle/>
-                    <a:p>
-                      <a:pPr latinLnBrk="1"/>
-                      <a:endParaRPr lang="ko-KR" altLang="en-US" dirty="0"/>
-                    </a:p>
-                  </a:txBody>
-                  <a:tcPr/>
-                </a:tc>
-                <a:tc>
-                  <a:txBody>
-                    <a:bodyPr/>
-                    <a:lstStyle/>
-                    <a:p>
-                      <a:pPr latinLnBrk="1"/>
-                      <a:endParaRPr lang="ko-KR" altLang="en-US" dirty="0"/>
-                    </a:p>
-                  </a:txBody>
-                  <a:tcPr/>
-                </a:tc>
-                <a:extLst>
-                  <a:ext uri="{0D108BD9-81ED-4DB2-BD59-A6C34878D82A}">
-                    <a16:rowId xmlns:a16="http://schemas.microsoft.com/office/drawing/2014/main" val="1869686725"/>
-                  </a:ext>
-                </a:extLst>
-              </a:tr>
-              <a:tr h="363575">
-                <a:tc>
-                  <a:txBody>
-                    <a:bodyPr/>
-                    <a:lstStyle/>
-                    <a:p>
-                      <a:pPr latinLnBrk="1"/>
-                      <a:endParaRPr lang="ko-KR" altLang="en-US"/>
-                    </a:p>
-                  </a:txBody>
-                  <a:tcPr/>
-                </a:tc>
-                <a:tc>
-                  <a:txBody>
-                    <a:bodyPr/>
-                    <a:lstStyle/>
-                    <a:p>
-                      <a:pPr latinLnBrk="1"/>
-                      <a:endParaRPr lang="ko-KR" altLang="en-US"/>
-                    </a:p>
-                  </a:txBody>
-                  <a:tcPr/>
-                </a:tc>
-                <a:tc>
-                  <a:txBody>
-                    <a:bodyPr/>
-                    <a:lstStyle/>
-                    <a:p>
-                      <a:pPr latinLnBrk="1"/>
-                      <a:endParaRPr lang="ko-KR" altLang="en-US"/>
-                    </a:p>
-                  </a:txBody>
-                  <a:tcPr/>
-                </a:tc>
-                <a:tc>
-                  <a:txBody>
-                    <a:bodyPr/>
-                    <a:lstStyle/>
-                    <a:p>
-                      <a:pPr latinLnBrk="1"/>
-                      <a:endParaRPr lang="ko-KR" altLang="en-US" dirty="0"/>
-                    </a:p>
-                  </a:txBody>
-                  <a:tcPr/>
-                </a:tc>
-                <a:tc>
-                  <a:txBody>
-                    <a:bodyPr/>
-                    <a:lstStyle/>
-                    <a:p>
-                      <a:pPr latinLnBrk="1"/>
-                      <a:endParaRPr lang="ko-KR" altLang="en-US" dirty="0"/>
-                    </a:p>
-                  </a:txBody>
-                  <a:tcPr/>
-                </a:tc>
-                <a:tc>
-                  <a:txBody>
-                    <a:bodyPr/>
-                    <a:lstStyle/>
-                    <a:p>
-                      <a:pPr latinLnBrk="1"/>
-                      <a:endParaRPr lang="ko-KR" altLang="en-US" dirty="0"/>
-                    </a:p>
-                  </a:txBody>
-                  <a:tcPr/>
-                </a:tc>
-                <a:tc>
-                  <a:txBody>
-                    <a:bodyPr/>
-                    <a:lstStyle/>
-                    <a:p>
-                      <a:pPr latinLnBrk="1"/>
-                      <a:endParaRPr lang="ko-KR" altLang="en-US" dirty="0"/>
-                    </a:p>
-                  </a:txBody>
-                  <a:tcPr/>
-                </a:tc>
-                <a:tc>
-                  <a:txBody>
-                    <a:bodyPr/>
-                    <a:lstStyle/>
-                    <a:p>
-                      <a:pPr latinLnBrk="1"/>
-                      <a:endParaRPr lang="ko-KR" altLang="en-US" dirty="0"/>
-                    </a:p>
-                  </a:txBody>
-                  <a:tcPr/>
-                </a:tc>
                 <a:extLst>
                   <a:ext uri="{0D108BD9-81ED-4DB2-BD59-A6C34878D82A}">
                     <a16:rowId xmlns:a16="http://schemas.microsoft.com/office/drawing/2014/main" val="4019990350"/>
-                  </a:ext>
-                </a:extLst>
-              </a:tr>
-              <a:tr h="330130">
-                <a:tc>
-                  <a:txBody>
-                    <a:bodyPr/>
-                    <a:lstStyle/>
-                    <a:p>
-                      <a:pPr latinLnBrk="1"/>
-                      <a:endParaRPr lang="ko-KR" altLang="en-US"/>
-                    </a:p>
-                  </a:txBody>
-                  <a:tcPr/>
-                </a:tc>
-                <a:tc>
-                  <a:txBody>
-                    <a:bodyPr/>
-                    <a:lstStyle/>
-                    <a:p>
-                      <a:pPr latinLnBrk="1"/>
-                      <a:endParaRPr lang="ko-KR" altLang="en-US"/>
-                    </a:p>
-                  </a:txBody>
-                  <a:tcPr/>
-                </a:tc>
-                <a:tc>
-                  <a:txBody>
-                    <a:bodyPr/>
-                    <a:lstStyle/>
-                    <a:p>
-                      <a:pPr latinLnBrk="1"/>
-                      <a:endParaRPr lang="ko-KR" altLang="en-US"/>
-                    </a:p>
-                  </a:txBody>
-                  <a:tcPr/>
-                </a:tc>
-                <a:tc>
-                  <a:txBody>
-                    <a:bodyPr/>
-                    <a:lstStyle/>
-                    <a:p>
-                      <a:pPr latinLnBrk="1"/>
-                      <a:endParaRPr lang="ko-KR" altLang="en-US" dirty="0"/>
-                    </a:p>
-                  </a:txBody>
-                  <a:tcPr/>
-                </a:tc>
-                <a:tc>
-                  <a:txBody>
-                    <a:bodyPr/>
-                    <a:lstStyle/>
-                    <a:p>
-                      <a:pPr latinLnBrk="1"/>
-                      <a:endParaRPr lang="ko-KR" altLang="en-US" dirty="0"/>
-                    </a:p>
-                  </a:txBody>
-                  <a:tcPr/>
-                </a:tc>
-                <a:tc>
-                  <a:txBody>
-                    <a:bodyPr/>
-                    <a:lstStyle/>
-                    <a:p>
-                      <a:pPr latinLnBrk="1"/>
-                      <a:endParaRPr lang="ko-KR" altLang="en-US" dirty="0"/>
-                    </a:p>
-                  </a:txBody>
-                  <a:tcPr/>
-                </a:tc>
-                <a:tc>
-                  <a:txBody>
-                    <a:bodyPr/>
-                    <a:lstStyle/>
-                    <a:p>
-                      <a:pPr latinLnBrk="1"/>
-                      <a:endParaRPr lang="ko-KR" altLang="en-US" dirty="0"/>
-                    </a:p>
-                  </a:txBody>
-                  <a:tcPr/>
-                </a:tc>
-                <a:tc>
-                  <a:txBody>
-                    <a:bodyPr/>
-                    <a:lstStyle/>
-                    <a:p>
-                      <a:pPr latinLnBrk="1"/>
-                      <a:endParaRPr lang="ko-KR" altLang="en-US" dirty="0"/>
-                    </a:p>
-                  </a:txBody>
-                  <a:tcPr/>
-                </a:tc>
-                <a:extLst>
-                  <a:ext uri="{0D108BD9-81ED-4DB2-BD59-A6C34878D82A}">
-                    <a16:rowId xmlns:a16="http://schemas.microsoft.com/office/drawing/2014/main" val="2182366554"/>
-                  </a:ext>
-                </a:extLst>
-              </a:tr>
-              <a:tr h="330130">
-                <a:tc>
-                  <a:txBody>
-                    <a:bodyPr/>
-                    <a:lstStyle/>
-                    <a:p>
-                      <a:pPr latinLnBrk="1"/>
-                      <a:endParaRPr lang="ko-KR" altLang="en-US"/>
-                    </a:p>
-                  </a:txBody>
-                  <a:tcPr/>
-                </a:tc>
-                <a:tc>
-                  <a:txBody>
-                    <a:bodyPr/>
-                    <a:lstStyle/>
-                    <a:p>
-                      <a:pPr latinLnBrk="1"/>
-                      <a:endParaRPr lang="ko-KR" altLang="en-US"/>
-                    </a:p>
-                  </a:txBody>
-                  <a:tcPr/>
-                </a:tc>
-                <a:tc>
-                  <a:txBody>
-                    <a:bodyPr/>
-                    <a:lstStyle/>
-                    <a:p>
-                      <a:pPr latinLnBrk="1"/>
-                      <a:endParaRPr lang="ko-KR" altLang="en-US"/>
-                    </a:p>
-                  </a:txBody>
-                  <a:tcPr/>
-                </a:tc>
-                <a:tc>
-                  <a:txBody>
-                    <a:bodyPr/>
-                    <a:lstStyle/>
-                    <a:p>
-                      <a:pPr latinLnBrk="1"/>
-                      <a:endParaRPr lang="ko-KR" altLang="en-US" dirty="0"/>
-                    </a:p>
-                  </a:txBody>
-                  <a:tcPr/>
-                </a:tc>
-                <a:tc>
-                  <a:txBody>
-                    <a:bodyPr/>
-                    <a:lstStyle/>
-                    <a:p>
-                      <a:pPr latinLnBrk="1"/>
-                      <a:endParaRPr lang="ko-KR" altLang="en-US" dirty="0"/>
-                    </a:p>
-                  </a:txBody>
-                  <a:tcPr/>
-                </a:tc>
-                <a:tc>
-                  <a:txBody>
-                    <a:bodyPr/>
-                    <a:lstStyle/>
-                    <a:p>
-                      <a:pPr latinLnBrk="1"/>
-                      <a:endParaRPr lang="ko-KR" altLang="en-US" dirty="0"/>
-                    </a:p>
-                  </a:txBody>
-                  <a:tcPr/>
-                </a:tc>
-                <a:tc>
-                  <a:txBody>
-                    <a:bodyPr/>
-                    <a:lstStyle/>
-                    <a:p>
-                      <a:pPr latinLnBrk="1"/>
-                      <a:endParaRPr lang="ko-KR" altLang="en-US" dirty="0"/>
-                    </a:p>
-                  </a:txBody>
-                  <a:tcPr/>
-                </a:tc>
-                <a:tc>
-                  <a:txBody>
-                    <a:bodyPr/>
-                    <a:lstStyle/>
-                    <a:p>
-                      <a:pPr latinLnBrk="1"/>
-                      <a:endParaRPr lang="ko-KR" altLang="en-US" dirty="0"/>
-                    </a:p>
-                  </a:txBody>
-                  <a:tcPr/>
-                </a:tc>
-                <a:extLst>
-                  <a:ext uri="{0D108BD9-81ED-4DB2-BD59-A6C34878D82A}">
-                    <a16:rowId xmlns:a16="http://schemas.microsoft.com/office/drawing/2014/main" val="3361994509"/>
                   </a:ext>
                 </a:extLst>
               </a:tr>
@@ -17902,147 +17423,6 @@
           </a:p>
         </p:txBody>
       </p:sp>
-      <p:pic>
-        <p:nvPicPr>
-          <p:cNvPr id="1028" name="Picture 4" descr="체크박스 - 무료 ui개 아이콘">
-            <a:extLst>
-              <a:ext uri="{FF2B5EF4-FFF2-40B4-BE49-F238E27FC236}">
-                <a16:creationId xmlns:a16="http://schemas.microsoft.com/office/drawing/2014/main" id="{0FD7A34E-24A7-450F-99EC-EE4E761AF701}"/>
-              </a:ext>
-            </a:extLst>
-          </p:cNvPr>
-          <p:cNvPicPr>
-            <a:picLocks noChangeAspect="1" noChangeArrowheads="1"/>
-          </p:cNvPicPr>
-          <p:nvPr/>
-        </p:nvPicPr>
-        <p:blipFill>
-          <a:blip r:embed="rId3" cstate="hqprint">
-            <a:extLst>
-              <a:ext uri="{28A0092B-C50C-407E-A947-70E740481C1C}">
-                <a14:useLocalDpi xmlns:a14="http://schemas.microsoft.com/office/drawing/2010/main" val="0"/>
-              </a:ext>
-            </a:extLst>
-          </a:blip>
-          <a:srcRect/>
-          <a:stretch>
-            <a:fillRect/>
-          </a:stretch>
-        </p:blipFill>
-        <p:spPr bwMode="auto">
-          <a:xfrm>
-            <a:off x="8856050" y="3373287"/>
-            <a:ext cx="380230" cy="380230"/>
-          </a:xfrm>
-          <a:prstGeom prst="rect">
-            <a:avLst/>
-          </a:prstGeom>
-          <a:noFill/>
-          <a:extLst>
-            <a:ext uri="{909E8E84-426E-40DD-AFC4-6F175D3DCCD1}">
-              <a14:hiddenFill xmlns:a14="http://schemas.microsoft.com/office/drawing/2010/main">
-                <a:solidFill>
-                  <a:srgbClr val="FFFFFF"/>
-                </a:solidFill>
-              </a14:hiddenFill>
-            </a:ext>
-          </a:extLst>
-        </p:spPr>
-      </p:pic>
-      <p:pic>
-        <p:nvPicPr>
-          <p:cNvPr id="27" name="Picture 4" descr="체크박스 - 무료 ui개 아이콘">
-            <a:extLst>
-              <a:ext uri="{FF2B5EF4-FFF2-40B4-BE49-F238E27FC236}">
-                <a16:creationId xmlns:a16="http://schemas.microsoft.com/office/drawing/2014/main" id="{147EDEC2-E497-42C2-9533-80C8A4E7C130}"/>
-              </a:ext>
-            </a:extLst>
-          </p:cNvPr>
-          <p:cNvPicPr>
-            <a:picLocks noChangeAspect="1" noChangeArrowheads="1"/>
-          </p:cNvPicPr>
-          <p:nvPr/>
-        </p:nvPicPr>
-        <p:blipFill>
-          <a:blip r:embed="rId3" cstate="hqprint">
-            <a:extLst>
-              <a:ext uri="{28A0092B-C50C-407E-A947-70E740481C1C}">
-                <a14:useLocalDpi xmlns:a14="http://schemas.microsoft.com/office/drawing/2010/main" val="0"/>
-              </a:ext>
-            </a:extLst>
-          </a:blip>
-          <a:srcRect/>
-          <a:stretch>
-            <a:fillRect/>
-          </a:stretch>
-        </p:blipFill>
-        <p:spPr bwMode="auto">
-          <a:xfrm>
-            <a:off x="8855315" y="3753330"/>
-            <a:ext cx="380230" cy="380230"/>
-          </a:xfrm>
-          <a:prstGeom prst="rect">
-            <a:avLst/>
-          </a:prstGeom>
-          <a:noFill/>
-          <a:extLst>
-            <a:ext uri="{909E8E84-426E-40DD-AFC4-6F175D3DCCD1}">
-              <a14:hiddenFill xmlns:a14="http://schemas.microsoft.com/office/drawing/2010/main">
-                <a:solidFill>
-                  <a:srgbClr val="FFFFFF"/>
-                </a:solidFill>
-              </a14:hiddenFill>
-            </a:ext>
-          </a:extLst>
-        </p:spPr>
-      </p:pic>
-      <p:pic>
-        <p:nvPicPr>
-          <p:cNvPr id="28" name="Picture 4" descr="체크박스 - 무료 ui개 아이콘">
-            <a:extLst>
-              <a:ext uri="{FF2B5EF4-FFF2-40B4-BE49-F238E27FC236}">
-                <a16:creationId xmlns:a16="http://schemas.microsoft.com/office/drawing/2014/main" id="{4EDA3887-7233-4208-B401-D6B1F8CABC13}"/>
-              </a:ext>
-            </a:extLst>
-          </p:cNvPr>
-          <p:cNvPicPr>
-            <a:picLocks noChangeAspect="1" noChangeArrowheads="1"/>
-          </p:cNvPicPr>
-          <p:nvPr/>
-        </p:nvPicPr>
-        <p:blipFill>
-          <a:blip r:embed="rId3" cstate="hqprint">
-            <a:extLst>
-              <a:ext uri="{28A0092B-C50C-407E-A947-70E740481C1C}">
-                <a14:useLocalDpi xmlns:a14="http://schemas.microsoft.com/office/drawing/2010/main" val="0"/>
-              </a:ext>
-            </a:extLst>
-          </a:blip>
-          <a:srcRect/>
-          <a:stretch>
-            <a:fillRect/>
-          </a:stretch>
-        </p:blipFill>
-        <p:spPr bwMode="auto">
-          <a:xfrm>
-            <a:off x="8855315" y="4120342"/>
-            <a:ext cx="380230" cy="380230"/>
-          </a:xfrm>
-          <a:prstGeom prst="rect">
-            <a:avLst/>
-          </a:prstGeom>
-          <a:noFill/>
-          <a:extLst>
-            <a:ext uri="{909E8E84-426E-40DD-AFC4-6F175D3DCCD1}">
-              <a14:hiddenFill xmlns:a14="http://schemas.microsoft.com/office/drawing/2010/main">
-                <a:solidFill>
-                  <a:srgbClr val="FFFFFF"/>
-                </a:solidFill>
-              </a14:hiddenFill>
-            </a:ext>
-          </a:extLst>
-        </p:spPr>
-      </p:pic>
       <p:sp>
         <p:nvSpPr>
           <p:cNvPr id="29" name="사각형: 둥근 모서리 28">
@@ -18227,7 +17607,7 @@
           <p:nvPr/>
         </p:nvPicPr>
         <p:blipFill rotWithShape="1">
-          <a:blip r:embed="rId4">
+          <a:blip r:embed="rId3">
             <a:extLst>
               <a:ext uri="{28A0092B-C50C-407E-A947-70E740481C1C}">
                 <a14:useLocalDpi xmlns:a14="http://schemas.microsoft.com/office/drawing/2010/main" val="0"/>
@@ -18546,12 +17926,396 @@
           </a:p>
         </p:txBody>
       </p:sp>
+      <p:graphicFrame>
+        <p:nvGraphicFramePr>
+          <p:cNvPr id="2" name="표 3">
+            <a:extLst>
+              <a:ext uri="{FF2B5EF4-FFF2-40B4-BE49-F238E27FC236}">
+                <a16:creationId xmlns:a16="http://schemas.microsoft.com/office/drawing/2014/main" id="{8CB5476F-3734-4B2A-8B9D-4B97DB281919}"/>
+              </a:ext>
+            </a:extLst>
+          </p:cNvPr>
+          <p:cNvGraphicFramePr>
+            <a:graphicFrameLocks noGrp="1"/>
+          </p:cNvGraphicFramePr>
+          <p:nvPr/>
+        </p:nvGraphicFramePr>
+        <p:xfrm>
+          <a:off x="3111151" y="3094979"/>
+          <a:ext cx="5949814" cy="2329756"/>
+        </p:xfrm>
+        <a:graphic>
+          <a:graphicData uri="http://schemas.openxmlformats.org/drawingml/2006/table">
+            <a:tbl>
+              <a:tblPr firstRow="1" bandRow="1">
+                <a:tableStyleId>{5940675A-B579-460E-94D1-54222C63F5DA}</a:tableStyleId>
+              </a:tblPr>
+              <a:tblGrid>
+                <a:gridCol w="1105249">
+                  <a:extLst>
+                    <a:ext uri="{9D8B030D-6E8A-4147-A177-3AD203B41FA5}">
+                      <a16:colId xmlns:a16="http://schemas.microsoft.com/office/drawing/2014/main" val="4286597566"/>
+                    </a:ext>
+                  </a:extLst>
+                </a:gridCol>
+                <a:gridCol w="711200">
+                  <a:extLst>
+                    <a:ext uri="{9D8B030D-6E8A-4147-A177-3AD203B41FA5}">
+                      <a16:colId xmlns:a16="http://schemas.microsoft.com/office/drawing/2014/main" val="437229603"/>
+                    </a:ext>
+                  </a:extLst>
+                </a:gridCol>
+                <a:gridCol w="2702107">
+                  <a:extLst>
+                    <a:ext uri="{9D8B030D-6E8A-4147-A177-3AD203B41FA5}">
+                      <a16:colId xmlns:a16="http://schemas.microsoft.com/office/drawing/2014/main" val="4146858838"/>
+                    </a:ext>
+                  </a:extLst>
+                </a:gridCol>
+                <a:gridCol w="1431258">
+                  <a:extLst>
+                    <a:ext uri="{9D8B030D-6E8A-4147-A177-3AD203B41FA5}">
+                      <a16:colId xmlns:a16="http://schemas.microsoft.com/office/drawing/2014/main" val="695159410"/>
+                    </a:ext>
+                  </a:extLst>
+                </a:gridCol>
+              </a:tblGrid>
+              <a:tr h="286261">
+                <a:tc>
+                  <a:txBody>
+                    <a:bodyPr/>
+                    <a:lstStyle/>
+                    <a:p>
+                      <a:pPr latinLnBrk="1"/>
+                      <a:r>
+                        <a:rPr lang="ko-KR" altLang="en-US" dirty="0"/>
+                        <a:t>회원번호</a:t>
+                      </a:r>
+                    </a:p>
+                  </a:txBody>
+                  <a:tcPr/>
+                </a:tc>
+                <a:tc>
+                  <a:txBody>
+                    <a:bodyPr/>
+                    <a:lstStyle/>
+                    <a:p>
+                      <a:pPr latinLnBrk="1"/>
+                      <a:r>
+                        <a:rPr lang="en-US" altLang="ko-KR" dirty="0"/>
+                        <a:t>ID</a:t>
+                      </a:r>
+                      <a:endParaRPr lang="ko-KR" altLang="en-US" dirty="0"/>
+                    </a:p>
+                  </a:txBody>
+                  <a:tcPr/>
+                </a:tc>
+                <a:tc>
+                  <a:txBody>
+                    <a:bodyPr/>
+                    <a:lstStyle/>
+                    <a:p>
+                      <a:pPr latinLnBrk="1"/>
+                      <a:r>
+                        <a:rPr lang="ko-KR" altLang="en-US" dirty="0"/>
+                        <a:t>이름</a:t>
+                      </a:r>
+                    </a:p>
+                  </a:txBody>
+                  <a:tcPr/>
+                </a:tc>
+                <a:tc>
+                  <a:txBody>
+                    <a:bodyPr/>
+                    <a:lstStyle/>
+                    <a:p>
+                      <a:pPr latinLnBrk="1"/>
+                      <a:r>
+                        <a:rPr lang="ko-KR" altLang="en-US" dirty="0"/>
+                        <a:t>비고</a:t>
+                      </a:r>
+                    </a:p>
+                  </a:txBody>
+                  <a:tcPr/>
+                </a:tc>
+                <a:extLst>
+                  <a:ext uri="{0D108BD9-81ED-4DB2-BD59-A6C34878D82A}">
+                    <a16:rowId xmlns:a16="http://schemas.microsoft.com/office/drawing/2014/main" val="123675452"/>
+                  </a:ext>
+                </a:extLst>
+              </a:tr>
+              <a:tr h="500956">
+                <a:tc>
+                  <a:txBody>
+                    <a:bodyPr/>
+                    <a:lstStyle/>
+                    <a:p>
+                      <a:pPr latinLnBrk="1"/>
+                      <a:endParaRPr lang="ko-KR" altLang="en-US" dirty="0"/>
+                    </a:p>
+                  </a:txBody>
+                  <a:tcPr/>
+                </a:tc>
+                <a:tc>
+                  <a:txBody>
+                    <a:bodyPr/>
+                    <a:lstStyle/>
+                    <a:p>
+                      <a:pPr latinLnBrk="1"/>
+                      <a:endParaRPr lang="ko-KR" altLang="en-US" dirty="0"/>
+                    </a:p>
+                  </a:txBody>
+                  <a:tcPr/>
+                </a:tc>
+                <a:tc>
+                  <a:txBody>
+                    <a:bodyPr/>
+                    <a:lstStyle/>
+                    <a:p>
+                      <a:pPr latinLnBrk="1"/>
+                      <a:r>
+                        <a:rPr lang="ko-KR" altLang="en-US" dirty="0" err="1"/>
+                        <a:t>클릭시</a:t>
+                      </a:r>
+                      <a:r>
+                        <a:rPr lang="ko-KR" altLang="en-US" dirty="0"/>
+                        <a:t> 세부정보창 오픈</a:t>
+                      </a:r>
+                    </a:p>
+                  </a:txBody>
+                  <a:tcPr/>
+                </a:tc>
+                <a:tc>
+                  <a:txBody>
+                    <a:bodyPr/>
+                    <a:lstStyle/>
+                    <a:p>
+                      <a:pPr latinLnBrk="1"/>
+                      <a:endParaRPr lang="ko-KR" altLang="en-US" dirty="0"/>
+                    </a:p>
+                  </a:txBody>
+                  <a:tcPr/>
+                </a:tc>
+                <a:extLst>
+                  <a:ext uri="{0D108BD9-81ED-4DB2-BD59-A6C34878D82A}">
+                    <a16:rowId xmlns:a16="http://schemas.microsoft.com/office/drawing/2014/main" val="221352405"/>
+                  </a:ext>
+                </a:extLst>
+              </a:tr>
+              <a:tr h="286261">
+                <a:tc>
+                  <a:txBody>
+                    <a:bodyPr/>
+                    <a:lstStyle/>
+                    <a:p>
+                      <a:pPr latinLnBrk="1"/>
+                      <a:endParaRPr lang="ko-KR" altLang="en-US"/>
+                    </a:p>
+                  </a:txBody>
+                  <a:tcPr/>
+                </a:tc>
+                <a:tc>
+                  <a:txBody>
+                    <a:bodyPr/>
+                    <a:lstStyle/>
+                    <a:p>
+                      <a:pPr latinLnBrk="1"/>
+                      <a:endParaRPr lang="ko-KR" altLang="en-US"/>
+                    </a:p>
+                  </a:txBody>
+                  <a:tcPr/>
+                </a:tc>
+                <a:tc>
+                  <a:txBody>
+                    <a:bodyPr/>
+                    <a:lstStyle/>
+                    <a:p>
+                      <a:pPr latinLnBrk="1"/>
+                      <a:endParaRPr lang="ko-KR" altLang="en-US"/>
+                    </a:p>
+                  </a:txBody>
+                  <a:tcPr/>
+                </a:tc>
+                <a:tc>
+                  <a:txBody>
+                    <a:bodyPr/>
+                    <a:lstStyle/>
+                    <a:p>
+                      <a:pPr latinLnBrk="1"/>
+                      <a:endParaRPr lang="ko-KR" altLang="en-US" dirty="0"/>
+                    </a:p>
+                  </a:txBody>
+                  <a:tcPr/>
+                </a:tc>
+                <a:extLst>
+                  <a:ext uri="{0D108BD9-81ED-4DB2-BD59-A6C34878D82A}">
+                    <a16:rowId xmlns:a16="http://schemas.microsoft.com/office/drawing/2014/main" val="3568295167"/>
+                  </a:ext>
+                </a:extLst>
+              </a:tr>
+              <a:tr h="286261">
+                <a:tc>
+                  <a:txBody>
+                    <a:bodyPr/>
+                    <a:lstStyle/>
+                    <a:p>
+                      <a:pPr latinLnBrk="1"/>
+                      <a:endParaRPr lang="ko-KR" altLang="en-US"/>
+                    </a:p>
+                  </a:txBody>
+                  <a:tcPr/>
+                </a:tc>
+                <a:tc>
+                  <a:txBody>
+                    <a:bodyPr/>
+                    <a:lstStyle/>
+                    <a:p>
+                      <a:pPr latinLnBrk="1"/>
+                      <a:endParaRPr lang="ko-KR" altLang="en-US" dirty="0"/>
+                    </a:p>
+                  </a:txBody>
+                  <a:tcPr/>
+                </a:tc>
+                <a:tc>
+                  <a:txBody>
+                    <a:bodyPr/>
+                    <a:lstStyle/>
+                    <a:p>
+                      <a:pPr latinLnBrk="1"/>
+                      <a:endParaRPr lang="ko-KR" altLang="en-US"/>
+                    </a:p>
+                  </a:txBody>
+                  <a:tcPr/>
+                </a:tc>
+                <a:tc>
+                  <a:txBody>
+                    <a:bodyPr/>
+                    <a:lstStyle/>
+                    <a:p>
+                      <a:pPr latinLnBrk="1"/>
+                      <a:endParaRPr lang="ko-KR" altLang="en-US" dirty="0"/>
+                    </a:p>
+                  </a:txBody>
+                  <a:tcPr/>
+                </a:tc>
+                <a:extLst>
+                  <a:ext uri="{0D108BD9-81ED-4DB2-BD59-A6C34878D82A}">
+                    <a16:rowId xmlns:a16="http://schemas.microsoft.com/office/drawing/2014/main" val="3196313567"/>
+                  </a:ext>
+                </a:extLst>
+              </a:tr>
+              <a:tr h="286261">
+                <a:tc>
+                  <a:txBody>
+                    <a:bodyPr/>
+                    <a:lstStyle/>
+                    <a:p>
+                      <a:pPr latinLnBrk="1"/>
+                      <a:endParaRPr lang="ko-KR" altLang="en-US"/>
+                    </a:p>
+                  </a:txBody>
+                  <a:tcPr/>
+                </a:tc>
+                <a:tc>
+                  <a:txBody>
+                    <a:bodyPr/>
+                    <a:lstStyle/>
+                    <a:p>
+                      <a:pPr latinLnBrk="1"/>
+                      <a:endParaRPr lang="ko-KR" altLang="en-US"/>
+                    </a:p>
+                  </a:txBody>
+                  <a:tcPr/>
+                </a:tc>
+                <a:tc>
+                  <a:txBody>
+                    <a:bodyPr/>
+                    <a:lstStyle/>
+                    <a:p>
+                      <a:pPr latinLnBrk="1"/>
+                      <a:endParaRPr lang="ko-KR" altLang="en-US"/>
+                    </a:p>
+                  </a:txBody>
+                  <a:tcPr/>
+                </a:tc>
+                <a:tc>
+                  <a:txBody>
+                    <a:bodyPr/>
+                    <a:lstStyle/>
+                    <a:p>
+                      <a:pPr latinLnBrk="1"/>
+                      <a:endParaRPr lang="ko-KR" altLang="en-US" dirty="0"/>
+                    </a:p>
+                  </a:txBody>
+                  <a:tcPr/>
+                </a:tc>
+                <a:extLst>
+                  <a:ext uri="{0D108BD9-81ED-4DB2-BD59-A6C34878D82A}">
+                    <a16:rowId xmlns:a16="http://schemas.microsoft.com/office/drawing/2014/main" val="1869686725"/>
+                  </a:ext>
+                </a:extLst>
+              </a:tr>
+              <a:tr h="286261">
+                <a:tc>
+                  <a:txBody>
+                    <a:bodyPr/>
+                    <a:lstStyle/>
+                    <a:p>
+                      <a:pPr latinLnBrk="1"/>
+                      <a:endParaRPr lang="ko-KR" altLang="en-US"/>
+                    </a:p>
+                  </a:txBody>
+                  <a:tcPr/>
+                </a:tc>
+                <a:tc>
+                  <a:txBody>
+                    <a:bodyPr/>
+                    <a:lstStyle/>
+                    <a:p>
+                      <a:pPr latinLnBrk="1"/>
+                      <a:endParaRPr lang="ko-KR" altLang="en-US"/>
+                    </a:p>
+                  </a:txBody>
+                  <a:tcPr/>
+                </a:tc>
+                <a:tc>
+                  <a:txBody>
+                    <a:bodyPr/>
+                    <a:lstStyle/>
+                    <a:p>
+                      <a:pPr latinLnBrk="1"/>
+                      <a:endParaRPr lang="ko-KR" altLang="en-US"/>
+                    </a:p>
+                  </a:txBody>
+                  <a:tcPr/>
+                </a:tc>
+                <a:tc>
+                  <a:txBody>
+                    <a:bodyPr/>
+                    <a:lstStyle/>
+                    <a:p>
+                      <a:pPr latinLnBrk="1"/>
+                      <a:endParaRPr lang="ko-KR" altLang="en-US" dirty="0"/>
+                    </a:p>
+                  </a:txBody>
+                  <a:tcPr/>
+                </a:tc>
+                <a:extLst>
+                  <a:ext uri="{0D108BD9-81ED-4DB2-BD59-A6C34878D82A}">
+                    <a16:rowId xmlns:a16="http://schemas.microsoft.com/office/drawing/2014/main" val="4019990350"/>
+                  </a:ext>
+                </a:extLst>
+              </a:tr>
+            </a:tbl>
+          </a:graphicData>
+        </a:graphic>
+      </p:graphicFrame>
       <p:sp>
         <p:nvSpPr>
-          <p:cNvPr id="12" name="사각형: 둥근 모서리 11">
-            <a:extLst>
-              <a:ext uri="{FF2B5EF4-FFF2-40B4-BE49-F238E27FC236}">
-                <a16:creationId xmlns:a16="http://schemas.microsoft.com/office/drawing/2014/main" id="{53223CA0-9F22-43FA-BFF0-5B29D4CFEC17}"/>
+          <p:cNvPr id="14" name="직사각형 13">
+            <a:extLst>
+              <a:ext uri="{FF2B5EF4-FFF2-40B4-BE49-F238E27FC236}">
+                <a16:creationId xmlns:a16="http://schemas.microsoft.com/office/drawing/2014/main" id="{F3E68132-3EEA-4F47-BF0D-95CC6367E09A}"/>
               </a:ext>
             </a:extLst>
           </p:cNvPr>
@@ -18560,13 +18324,118 @@
         </p:nvSpPr>
         <p:spPr>
           <a:xfrm>
-            <a:off x="4092152" y="1960133"/>
+            <a:off x="6175694" y="2464587"/>
+            <a:ext cx="1890320" cy="379602"/>
+          </a:xfrm>
+          <a:prstGeom prst="rect">
+            <a:avLst/>
+          </a:prstGeom>
+          <a:scene3d>
+            <a:camera prst="orthographicFront"/>
+            <a:lightRig rig="threePt" dir="t"/>
+          </a:scene3d>
+          <a:sp3d>
+            <a:bevelT prst="relaxedInset"/>
+          </a:sp3d>
+        </p:spPr>
+        <p:style>
+          <a:lnRef idx="2">
+            <a:schemeClr val="dk1"/>
+          </a:lnRef>
+          <a:fillRef idx="1">
+            <a:schemeClr val="lt1"/>
+          </a:fillRef>
+          <a:effectRef idx="0">
+            <a:schemeClr val="dk1"/>
+          </a:effectRef>
+          <a:fontRef idx="minor">
+            <a:schemeClr val="dk1"/>
+          </a:fontRef>
+        </p:style>
+        <p:txBody>
+          <a:bodyPr rtlCol="0" anchor="ctr"/>
+          <a:lstStyle/>
+          <a:p>
+            <a:pPr algn="ctr"/>
+            <a:r>
+              <a:rPr lang="ko-KR" altLang="en-US" dirty="0" err="1"/>
+              <a:t>입력창</a:t>
+            </a:r>
+            <a:endParaRPr lang="ko-KR" altLang="en-US" dirty="0"/>
+          </a:p>
+        </p:txBody>
+      </p:sp>
+      <p:sp>
+        <p:nvSpPr>
+          <p:cNvPr id="4" name="직사각형 3">
+            <a:extLst>
+              <a:ext uri="{FF2B5EF4-FFF2-40B4-BE49-F238E27FC236}">
+                <a16:creationId xmlns:a16="http://schemas.microsoft.com/office/drawing/2014/main" id="{2BD1836D-62AD-429B-B8FD-670432A51B98}"/>
+              </a:ext>
+            </a:extLst>
+          </p:cNvPr>
+          <p:cNvSpPr/>
+          <p:nvPr/>
+        </p:nvSpPr>
+        <p:spPr>
+          <a:xfrm>
+            <a:off x="4844487" y="2450189"/>
+            <a:ext cx="1241571" cy="379602"/>
+          </a:xfrm>
+          <a:prstGeom prst="rect">
+            <a:avLst/>
+          </a:prstGeom>
+          <a:noFill/>
+          <a:ln>
+            <a:noFill/>
+          </a:ln>
+        </p:spPr>
+        <p:style>
+          <a:lnRef idx="0">
+            <a:scrgbClr r="0" g="0" b="0"/>
+          </a:lnRef>
+          <a:fillRef idx="0">
+            <a:scrgbClr r="0" g="0" b="0"/>
+          </a:fillRef>
+          <a:effectRef idx="0">
+            <a:scrgbClr r="0" g="0" b="0"/>
+          </a:effectRef>
+          <a:fontRef idx="minor">
+            <a:schemeClr val="dk1"/>
+          </a:fontRef>
+        </p:style>
+        <p:txBody>
+          <a:bodyPr rtlCol="0" anchor="ctr"/>
+          <a:lstStyle/>
+          <a:p>
+            <a:pPr algn="ctr"/>
+            <a:r>
+              <a:rPr lang="ko-KR" altLang="en-US" dirty="0"/>
+              <a:t>회원 검색</a:t>
+            </a:r>
+          </a:p>
+        </p:txBody>
+      </p:sp>
+      <p:sp>
+        <p:nvSpPr>
+          <p:cNvPr id="18" name="사각형: 둥근 모서리 17">
+            <a:extLst>
+              <a:ext uri="{FF2B5EF4-FFF2-40B4-BE49-F238E27FC236}">
+                <a16:creationId xmlns:a16="http://schemas.microsoft.com/office/drawing/2014/main" id="{C166CE8D-4043-40F6-BC96-E59AE5FFD6FF}"/>
+              </a:ext>
+            </a:extLst>
+          </p:cNvPr>
+          <p:cNvSpPr/>
+          <p:nvPr/>
+        </p:nvSpPr>
+        <p:spPr>
+          <a:xfrm>
+            <a:off x="8180000" y="2488312"/>
             <a:ext cx="1350630" cy="332151"/>
           </a:xfrm>
           <a:prstGeom prst="roundRect">
             <a:avLst/>
           </a:prstGeom>
-          <a:noFill/>
           <a:scene3d>
             <a:camera prst="orthographicFront"/>
             <a:lightRig rig="threePt" dir="t"/>
@@ -18596,17 +18465,17 @@
             <a:pPr algn="ctr"/>
             <a:r>
               <a:rPr lang="ko-KR" altLang="en-US" dirty="0"/>
-              <a:t>회원 관리</a:t>
+              <a:t>확인</a:t>
             </a:r>
           </a:p>
         </p:txBody>
       </p:sp>
       <p:sp>
         <p:nvSpPr>
-          <p:cNvPr id="13" name="사각형: 둥근 모서리 12">
-            <a:extLst>
-              <a:ext uri="{FF2B5EF4-FFF2-40B4-BE49-F238E27FC236}">
-                <a16:creationId xmlns:a16="http://schemas.microsoft.com/office/drawing/2014/main" id="{AC0B99E6-C7CE-4EAE-8D86-EA644D113C96}"/>
+          <p:cNvPr id="29" name="사각형: 둥근 모서리 28">
+            <a:extLst>
+              <a:ext uri="{FF2B5EF4-FFF2-40B4-BE49-F238E27FC236}">
+                <a16:creationId xmlns:a16="http://schemas.microsoft.com/office/drawing/2014/main" id="{ED3582AD-3A2A-4E69-8037-4519D376757B}"/>
               </a:ext>
             </a:extLst>
           </p:cNvPr>
@@ -18615,63 +18484,8 @@
         </p:nvSpPr>
         <p:spPr>
           <a:xfrm>
-            <a:off x="2538519" y="1960133"/>
-            <a:ext cx="1483149" cy="332151"/>
-          </a:xfrm>
-          <a:prstGeom prst="roundRect">
-            <a:avLst/>
-          </a:prstGeom>
-          <a:noFill/>
-          <a:scene3d>
-            <a:camera prst="orthographicFront"/>
-            <a:lightRig rig="threePt" dir="t"/>
-          </a:scene3d>
-          <a:sp3d>
-            <a:bevelT/>
-          </a:sp3d>
-        </p:spPr>
-        <p:style>
-          <a:lnRef idx="2">
-            <a:schemeClr val="dk1"/>
-          </a:lnRef>
-          <a:fillRef idx="1">
-            <a:schemeClr val="lt1"/>
-          </a:fillRef>
-          <a:effectRef idx="0">
-            <a:schemeClr val="dk1"/>
-          </a:effectRef>
-          <a:fontRef idx="minor">
-            <a:schemeClr val="dk1"/>
-          </a:fontRef>
-        </p:style>
-        <p:txBody>
-          <a:bodyPr rtlCol="0" anchor="ctr"/>
-          <a:lstStyle/>
-          <a:p>
-            <a:pPr algn="ctr"/>
-            <a:r>
-              <a:rPr lang="ko-KR" altLang="en-US" dirty="0"/>
-              <a:t>방문자 관리</a:t>
-            </a:r>
-          </a:p>
-        </p:txBody>
-      </p:sp>
-      <p:sp>
-        <p:nvSpPr>
-          <p:cNvPr id="14" name="사각형: 둥근 모서리 13">
-            <a:extLst>
-              <a:ext uri="{FF2B5EF4-FFF2-40B4-BE49-F238E27FC236}">
-                <a16:creationId xmlns:a16="http://schemas.microsoft.com/office/drawing/2014/main" id="{F9BA5A55-42CD-4233-BF84-B585B606AD45}"/>
-              </a:ext>
-            </a:extLst>
-          </p:cNvPr>
-          <p:cNvSpPr/>
-          <p:nvPr/>
-        </p:nvSpPr>
-        <p:spPr>
-          <a:xfrm>
-            <a:off x="5513267" y="1961319"/>
-            <a:ext cx="1890320" cy="332151"/>
+            <a:off x="4092152" y="1956641"/>
+            <a:ext cx="1350630" cy="332151"/>
           </a:xfrm>
           <a:prstGeom prst="roundRect">
             <a:avLst/>
@@ -18708,17 +18522,17 @@
             <a:pPr algn="ctr"/>
             <a:r>
               <a:rPr lang="ko-KR" altLang="en-US" dirty="0"/>
-              <a:t>판매제품 관리</a:t>
+              <a:t>회원 관리</a:t>
             </a:r>
           </a:p>
         </p:txBody>
       </p:sp>
       <p:sp>
         <p:nvSpPr>
-          <p:cNvPr id="15" name="직사각형 14">
-            <a:extLst>
-              <a:ext uri="{FF2B5EF4-FFF2-40B4-BE49-F238E27FC236}">
-                <a16:creationId xmlns:a16="http://schemas.microsoft.com/office/drawing/2014/main" id="{57F9FD6B-5476-451E-8ECB-955FD2C4C18E}"/>
+          <p:cNvPr id="30" name="사각형: 둥근 모서리 29">
+            <a:extLst>
+              <a:ext uri="{FF2B5EF4-FFF2-40B4-BE49-F238E27FC236}">
+                <a16:creationId xmlns:a16="http://schemas.microsoft.com/office/drawing/2014/main" id="{136CBDC3-80D9-4AF8-9A74-DBDF97421427}"/>
               </a:ext>
             </a:extLst>
           </p:cNvPr>
@@ -18727,12 +18541,22 @@
         </p:nvSpPr>
         <p:spPr>
           <a:xfrm>
-            <a:off x="2538518" y="3094892"/>
-            <a:ext cx="7100432" cy="2735457"/>
-          </a:xfrm>
-          <a:prstGeom prst="rect">
+            <a:off x="2538519" y="1956641"/>
+            <a:ext cx="1483149" cy="332151"/>
+          </a:xfrm>
+          <a:prstGeom prst="roundRect">
             <a:avLst/>
           </a:prstGeom>
+          <a:solidFill>
+            <a:schemeClr val="bg1"/>
+          </a:solidFill>
+          <a:scene3d>
+            <a:camera prst="orthographicFront"/>
+            <a:lightRig rig="threePt" dir="t"/>
+          </a:scene3d>
+          <a:sp3d>
+            <a:bevelT/>
+          </a:sp3d>
         </p:spPr>
         <p:style>
           <a:lnRef idx="2">
@@ -18754,22 +18578,73 @@
           <a:p>
             <a:pPr algn="ctr"/>
             <a:r>
-              <a:rPr lang="ko-KR" altLang="en-US" dirty="0" err="1"/>
-              <a:t>미구현</a:t>
-            </a:r>
-            <a:r>
               <a:rPr lang="ko-KR" altLang="en-US" dirty="0"/>
-              <a:t> 예정</a:t>
-            </a:r>
+              <a:t>방문자 관리</a:t>
+            </a:r>
+          </a:p>
+        </p:txBody>
+      </p:sp>
+      <p:sp>
+        <p:nvSpPr>
+          <p:cNvPr id="31" name="사각형: 둥근 모서리 30">
+            <a:extLst>
+              <a:ext uri="{FF2B5EF4-FFF2-40B4-BE49-F238E27FC236}">
+                <a16:creationId xmlns:a16="http://schemas.microsoft.com/office/drawing/2014/main" id="{E5D529DD-4A39-4151-8D92-EB737CE6CE8C}"/>
+              </a:ext>
+            </a:extLst>
+          </p:cNvPr>
+          <p:cNvSpPr/>
+          <p:nvPr/>
+        </p:nvSpPr>
+        <p:spPr>
+          <a:xfrm>
+            <a:off x="5513267" y="1957827"/>
+            <a:ext cx="1890320" cy="332151"/>
+          </a:xfrm>
+          <a:prstGeom prst="roundRect">
+            <a:avLst/>
+          </a:prstGeom>
+          <a:scene3d>
+            <a:camera prst="orthographicFront"/>
+            <a:lightRig rig="threePt" dir="t"/>
+          </a:scene3d>
+          <a:sp3d>
+            <a:bevelT/>
+          </a:sp3d>
+        </p:spPr>
+        <p:style>
+          <a:lnRef idx="2">
+            <a:schemeClr val="dk1"/>
+          </a:lnRef>
+          <a:fillRef idx="1">
+            <a:schemeClr val="lt1"/>
+          </a:fillRef>
+          <a:effectRef idx="0">
+            <a:schemeClr val="dk1"/>
+          </a:effectRef>
+          <a:fontRef idx="minor">
+            <a:schemeClr val="dk1"/>
+          </a:fontRef>
+        </p:style>
+        <p:txBody>
+          <a:bodyPr rtlCol="0" anchor="ctr"/>
+          <a:lstStyle/>
+          <a:p>
+            <a:pPr algn="ctr"/>
+            <a:r>
+              <a:rPr lang="ko-KR" altLang="en-US"/>
+              <a:t>판매제품 관리</a:t>
+            </a:r>
+            <a:endParaRPr lang="ko-KR" altLang="en-US" dirty="0"/>
           </a:p>
         </p:txBody>
       </p:sp>
       <p:pic>
         <p:nvPicPr>
-          <p:cNvPr id="23" name="Picture 2" descr="스크롤바 이미지 - 게티이미지뱅크">
-            <a:extLst>
-              <a:ext uri="{FF2B5EF4-FFF2-40B4-BE49-F238E27FC236}">
-                <a16:creationId xmlns:a16="http://schemas.microsoft.com/office/drawing/2014/main" id="{A893E749-20E4-4CDC-83EC-9F55ED7942D3}"/>
+          <p:cNvPr id="19" name="Picture 2" descr="스크롤바 이미지 - 게티이미지뱅크">
+            <a:extLst>
+              <a:ext uri="{FF2B5EF4-FFF2-40B4-BE49-F238E27FC236}">
+                <a16:creationId xmlns:a16="http://schemas.microsoft.com/office/drawing/2014/main" id="{CC87AAC0-98D2-40C3-808D-2F81AE4EFA7F}"/>
               </a:ext>
             </a:extLst>
           </p:cNvPr>
@@ -18809,6 +18684,2088 @@
           </a:extLst>
         </p:spPr>
       </p:pic>
+      <p:sp>
+        <p:nvSpPr>
+          <p:cNvPr id="20" name="직사각형 19">
+            <a:extLst>
+              <a:ext uri="{FF2B5EF4-FFF2-40B4-BE49-F238E27FC236}">
+                <a16:creationId xmlns:a16="http://schemas.microsoft.com/office/drawing/2014/main" id="{553AA8AC-F6FE-421C-8814-E0E841CA4DEC}"/>
+              </a:ext>
+            </a:extLst>
+          </p:cNvPr>
+          <p:cNvSpPr/>
+          <p:nvPr/>
+        </p:nvSpPr>
+        <p:spPr>
+          <a:xfrm>
+            <a:off x="2323595" y="1811536"/>
+            <a:ext cx="7532702" cy="4194982"/>
+          </a:xfrm>
+          <a:prstGeom prst="rect">
+            <a:avLst/>
+          </a:prstGeom>
+          <a:solidFill>
+            <a:schemeClr val="bg1">
+              <a:lumMod val="75000"/>
+              <a:alpha val="71000"/>
+            </a:schemeClr>
+          </a:solidFill>
+        </p:spPr>
+        <p:style>
+          <a:lnRef idx="2">
+            <a:schemeClr val="dk1"/>
+          </a:lnRef>
+          <a:fillRef idx="1">
+            <a:schemeClr val="lt1"/>
+          </a:fillRef>
+          <a:effectRef idx="0">
+            <a:schemeClr val="dk1"/>
+          </a:effectRef>
+          <a:fontRef idx="minor">
+            <a:schemeClr val="dk1"/>
+          </a:fontRef>
+        </p:style>
+        <p:txBody>
+          <a:bodyPr rtlCol="0" anchor="ctr"/>
+          <a:lstStyle/>
+          <a:p>
+            <a:pPr algn="ctr"/>
+            <a:endParaRPr lang="ko-KR" altLang="en-US" dirty="0"/>
+          </a:p>
+        </p:txBody>
+      </p:sp>
+      <p:sp>
+        <p:nvSpPr>
+          <p:cNvPr id="21" name="직사각형 20">
+            <a:extLst>
+              <a:ext uri="{FF2B5EF4-FFF2-40B4-BE49-F238E27FC236}">
+                <a16:creationId xmlns:a16="http://schemas.microsoft.com/office/drawing/2014/main" id="{E7D0155D-B20E-4EE5-A9B5-8092976BC20E}"/>
+              </a:ext>
+            </a:extLst>
+          </p:cNvPr>
+          <p:cNvSpPr/>
+          <p:nvPr/>
+        </p:nvSpPr>
+        <p:spPr>
+          <a:xfrm>
+            <a:off x="3598606" y="1956641"/>
+            <a:ext cx="5102942" cy="4724377"/>
+          </a:xfrm>
+          <a:prstGeom prst="rect">
+            <a:avLst/>
+          </a:prstGeom>
+        </p:spPr>
+        <p:style>
+          <a:lnRef idx="2">
+            <a:schemeClr val="dk1"/>
+          </a:lnRef>
+          <a:fillRef idx="1">
+            <a:schemeClr val="lt1"/>
+          </a:fillRef>
+          <a:effectRef idx="0">
+            <a:schemeClr val="dk1"/>
+          </a:effectRef>
+          <a:fontRef idx="minor">
+            <a:schemeClr val="dk1"/>
+          </a:fontRef>
+        </p:style>
+        <p:txBody>
+          <a:bodyPr rtlCol="0" anchor="ctr"/>
+          <a:lstStyle/>
+          <a:p>
+            <a:pPr algn="ctr"/>
+            <a:endParaRPr lang="ko-KR" altLang="en-US" dirty="0"/>
+          </a:p>
+        </p:txBody>
+      </p:sp>
+      <p:sp>
+        <p:nvSpPr>
+          <p:cNvPr id="22" name="직사각형 21">
+            <a:extLst>
+              <a:ext uri="{FF2B5EF4-FFF2-40B4-BE49-F238E27FC236}">
+                <a16:creationId xmlns:a16="http://schemas.microsoft.com/office/drawing/2014/main" id="{CCDB1194-6AB1-470E-842C-9B0E2D02DADE}"/>
+              </a:ext>
+            </a:extLst>
+          </p:cNvPr>
+          <p:cNvSpPr/>
+          <p:nvPr/>
+        </p:nvSpPr>
+        <p:spPr>
+          <a:xfrm>
+            <a:off x="4964712" y="1997207"/>
+            <a:ext cx="2242691" cy="436691"/>
+          </a:xfrm>
+          <a:prstGeom prst="rect">
+            <a:avLst/>
+          </a:prstGeom>
+          <a:solidFill>
+            <a:schemeClr val="bg1"/>
+          </a:solidFill>
+          <a:ln>
+            <a:solidFill>
+              <a:schemeClr val="tx1"/>
+            </a:solidFill>
+          </a:ln>
+        </p:spPr>
+        <p:style>
+          <a:lnRef idx="2">
+            <a:schemeClr val="accent1">
+              <a:shade val="50000"/>
+            </a:schemeClr>
+          </a:lnRef>
+          <a:fillRef idx="1">
+            <a:schemeClr val="accent1"/>
+          </a:fillRef>
+          <a:effectRef idx="0">
+            <a:schemeClr val="accent1"/>
+          </a:effectRef>
+          <a:fontRef idx="minor">
+            <a:schemeClr val="lt1"/>
+          </a:fontRef>
+        </p:style>
+        <p:txBody>
+          <a:bodyPr rtlCol="0" anchor="ctr"/>
+          <a:lstStyle/>
+          <a:p>
+            <a:pPr algn="ctr"/>
+            <a:r>
+              <a:rPr lang="ko-KR" altLang="en-US" dirty="0">
+                <a:solidFill>
+                  <a:schemeClr val="tx1"/>
+                </a:solidFill>
+              </a:rPr>
+              <a:t>회원 세부 정보 창</a:t>
+            </a:r>
+          </a:p>
+        </p:txBody>
+      </p:sp>
+      <p:sp>
+        <p:nvSpPr>
+          <p:cNvPr id="24" name="직사각형 23">
+            <a:extLst>
+              <a:ext uri="{FF2B5EF4-FFF2-40B4-BE49-F238E27FC236}">
+                <a16:creationId xmlns:a16="http://schemas.microsoft.com/office/drawing/2014/main" id="{01E79B0A-918E-480F-B1AC-609E43FF9FE7}"/>
+              </a:ext>
+            </a:extLst>
+          </p:cNvPr>
+          <p:cNvSpPr/>
+          <p:nvPr/>
+        </p:nvSpPr>
+        <p:spPr>
+          <a:xfrm>
+            <a:off x="3756735" y="2619591"/>
+            <a:ext cx="1264476" cy="436691"/>
+          </a:xfrm>
+          <a:prstGeom prst="rect">
+            <a:avLst/>
+          </a:prstGeom>
+          <a:solidFill>
+            <a:schemeClr val="bg1"/>
+          </a:solidFill>
+          <a:ln>
+            <a:solidFill>
+              <a:schemeClr val="tx1"/>
+            </a:solidFill>
+          </a:ln>
+        </p:spPr>
+        <p:style>
+          <a:lnRef idx="2">
+            <a:schemeClr val="accent1">
+              <a:shade val="50000"/>
+            </a:schemeClr>
+          </a:lnRef>
+          <a:fillRef idx="1">
+            <a:schemeClr val="accent1"/>
+          </a:fillRef>
+          <a:effectRef idx="0">
+            <a:schemeClr val="accent1"/>
+          </a:effectRef>
+          <a:fontRef idx="minor">
+            <a:schemeClr val="lt1"/>
+          </a:fontRef>
+        </p:style>
+        <p:txBody>
+          <a:bodyPr rtlCol="0" anchor="ctr"/>
+          <a:lstStyle/>
+          <a:p>
+            <a:pPr algn="ctr"/>
+            <a:r>
+              <a:rPr lang="en-US" altLang="ko-KR" dirty="0">
+                <a:solidFill>
+                  <a:schemeClr val="tx1"/>
+                </a:solidFill>
+              </a:rPr>
+              <a:t>ID</a:t>
+            </a:r>
+            <a:endParaRPr lang="ko-KR" altLang="en-US" dirty="0">
+              <a:solidFill>
+                <a:schemeClr val="tx1"/>
+              </a:solidFill>
+            </a:endParaRPr>
+          </a:p>
+        </p:txBody>
+      </p:sp>
+      <p:sp>
+        <p:nvSpPr>
+          <p:cNvPr id="25" name="직사각형 24">
+            <a:extLst>
+              <a:ext uri="{FF2B5EF4-FFF2-40B4-BE49-F238E27FC236}">
+                <a16:creationId xmlns:a16="http://schemas.microsoft.com/office/drawing/2014/main" id="{8D9AF1C9-B176-47D0-84BA-4261C7625908}"/>
+              </a:ext>
+            </a:extLst>
+          </p:cNvPr>
+          <p:cNvSpPr/>
+          <p:nvPr/>
+        </p:nvSpPr>
+        <p:spPr>
+          <a:xfrm>
+            <a:off x="3756735" y="3115056"/>
+            <a:ext cx="1264476" cy="436691"/>
+          </a:xfrm>
+          <a:prstGeom prst="rect">
+            <a:avLst/>
+          </a:prstGeom>
+          <a:solidFill>
+            <a:schemeClr val="bg1"/>
+          </a:solidFill>
+          <a:ln>
+            <a:solidFill>
+              <a:schemeClr val="tx1"/>
+            </a:solidFill>
+          </a:ln>
+        </p:spPr>
+        <p:style>
+          <a:lnRef idx="2">
+            <a:schemeClr val="accent1">
+              <a:shade val="50000"/>
+            </a:schemeClr>
+          </a:lnRef>
+          <a:fillRef idx="1">
+            <a:schemeClr val="accent1"/>
+          </a:fillRef>
+          <a:effectRef idx="0">
+            <a:schemeClr val="accent1"/>
+          </a:effectRef>
+          <a:fontRef idx="minor">
+            <a:schemeClr val="lt1"/>
+          </a:fontRef>
+        </p:style>
+        <p:txBody>
+          <a:bodyPr rtlCol="0" anchor="ctr"/>
+          <a:lstStyle/>
+          <a:p>
+            <a:pPr algn="ctr"/>
+            <a:r>
+              <a:rPr lang="ko-KR" altLang="en-US">
+                <a:solidFill>
+                  <a:schemeClr val="tx1"/>
+                </a:solidFill>
+              </a:rPr>
+              <a:t>이름</a:t>
+            </a:r>
+            <a:endParaRPr lang="ko-KR" altLang="en-US" dirty="0">
+              <a:solidFill>
+                <a:schemeClr val="tx1"/>
+              </a:solidFill>
+            </a:endParaRPr>
+          </a:p>
+        </p:txBody>
+      </p:sp>
+      <p:sp>
+        <p:nvSpPr>
+          <p:cNvPr id="26" name="직사각형 25">
+            <a:extLst>
+              <a:ext uri="{FF2B5EF4-FFF2-40B4-BE49-F238E27FC236}">
+                <a16:creationId xmlns:a16="http://schemas.microsoft.com/office/drawing/2014/main" id="{A8B6E567-8996-403B-A2B3-18E6B3801550}"/>
+              </a:ext>
+            </a:extLst>
+          </p:cNvPr>
+          <p:cNvSpPr/>
+          <p:nvPr/>
+        </p:nvSpPr>
+        <p:spPr>
+          <a:xfrm>
+            <a:off x="3756735" y="3610521"/>
+            <a:ext cx="1264476" cy="436691"/>
+          </a:xfrm>
+          <a:prstGeom prst="rect">
+            <a:avLst/>
+          </a:prstGeom>
+          <a:solidFill>
+            <a:schemeClr val="bg1"/>
+          </a:solidFill>
+          <a:ln>
+            <a:solidFill>
+              <a:schemeClr val="tx1"/>
+            </a:solidFill>
+          </a:ln>
+        </p:spPr>
+        <p:style>
+          <a:lnRef idx="2">
+            <a:schemeClr val="accent1">
+              <a:shade val="50000"/>
+            </a:schemeClr>
+          </a:lnRef>
+          <a:fillRef idx="1">
+            <a:schemeClr val="accent1"/>
+          </a:fillRef>
+          <a:effectRef idx="0">
+            <a:schemeClr val="accent1"/>
+          </a:effectRef>
+          <a:fontRef idx="minor">
+            <a:schemeClr val="lt1"/>
+          </a:fontRef>
+        </p:style>
+        <p:txBody>
+          <a:bodyPr rtlCol="0" anchor="ctr"/>
+          <a:lstStyle/>
+          <a:p>
+            <a:pPr algn="ctr"/>
+            <a:r>
+              <a:rPr lang="ko-KR" altLang="en-US">
+                <a:solidFill>
+                  <a:schemeClr val="tx1"/>
+                </a:solidFill>
+              </a:rPr>
+              <a:t>가입일</a:t>
+            </a:r>
+            <a:endParaRPr lang="ko-KR" altLang="en-US" dirty="0">
+              <a:solidFill>
+                <a:schemeClr val="tx1"/>
+              </a:solidFill>
+            </a:endParaRPr>
+          </a:p>
+        </p:txBody>
+      </p:sp>
+      <p:sp>
+        <p:nvSpPr>
+          <p:cNvPr id="27" name="직사각형 26">
+            <a:extLst>
+              <a:ext uri="{FF2B5EF4-FFF2-40B4-BE49-F238E27FC236}">
+                <a16:creationId xmlns:a16="http://schemas.microsoft.com/office/drawing/2014/main" id="{F2B39096-11C9-4BEC-B86E-24F913676146}"/>
+              </a:ext>
+            </a:extLst>
+          </p:cNvPr>
+          <p:cNvSpPr/>
+          <p:nvPr/>
+        </p:nvSpPr>
+        <p:spPr>
+          <a:xfrm>
+            <a:off x="3756735" y="4105986"/>
+            <a:ext cx="1264476" cy="436691"/>
+          </a:xfrm>
+          <a:prstGeom prst="rect">
+            <a:avLst/>
+          </a:prstGeom>
+          <a:solidFill>
+            <a:schemeClr val="bg1"/>
+          </a:solidFill>
+          <a:ln>
+            <a:solidFill>
+              <a:schemeClr val="tx1"/>
+            </a:solidFill>
+          </a:ln>
+        </p:spPr>
+        <p:style>
+          <a:lnRef idx="2">
+            <a:schemeClr val="accent1">
+              <a:shade val="50000"/>
+            </a:schemeClr>
+          </a:lnRef>
+          <a:fillRef idx="1">
+            <a:schemeClr val="accent1"/>
+          </a:fillRef>
+          <a:effectRef idx="0">
+            <a:schemeClr val="accent1"/>
+          </a:effectRef>
+          <a:fontRef idx="minor">
+            <a:schemeClr val="lt1"/>
+          </a:fontRef>
+        </p:style>
+        <p:txBody>
+          <a:bodyPr rtlCol="0" anchor="ctr"/>
+          <a:lstStyle/>
+          <a:p>
+            <a:pPr algn="ctr"/>
+            <a:r>
+              <a:rPr lang="ko-KR" altLang="en-US" dirty="0">
+                <a:solidFill>
+                  <a:schemeClr val="tx1"/>
+                </a:solidFill>
+              </a:rPr>
+              <a:t>정보</a:t>
+            </a:r>
+            <a:r>
+              <a:rPr lang="en-US" altLang="ko-KR" dirty="0">
+                <a:solidFill>
+                  <a:schemeClr val="tx1"/>
+                </a:solidFill>
+              </a:rPr>
+              <a:t>1</a:t>
+            </a:r>
+            <a:endParaRPr lang="ko-KR" altLang="en-US" dirty="0">
+              <a:solidFill>
+                <a:schemeClr val="tx1"/>
+              </a:solidFill>
+            </a:endParaRPr>
+          </a:p>
+        </p:txBody>
+      </p:sp>
+      <p:sp>
+        <p:nvSpPr>
+          <p:cNvPr id="28" name="직사각형 27">
+            <a:extLst>
+              <a:ext uri="{FF2B5EF4-FFF2-40B4-BE49-F238E27FC236}">
+                <a16:creationId xmlns:a16="http://schemas.microsoft.com/office/drawing/2014/main" id="{D4E7BC15-1BD4-448A-9923-EB8D581E9CC0}"/>
+              </a:ext>
+            </a:extLst>
+          </p:cNvPr>
+          <p:cNvSpPr/>
+          <p:nvPr/>
+        </p:nvSpPr>
+        <p:spPr>
+          <a:xfrm>
+            <a:off x="3756735" y="4601451"/>
+            <a:ext cx="1264476" cy="436691"/>
+          </a:xfrm>
+          <a:prstGeom prst="rect">
+            <a:avLst/>
+          </a:prstGeom>
+          <a:solidFill>
+            <a:schemeClr val="bg1"/>
+          </a:solidFill>
+          <a:ln>
+            <a:solidFill>
+              <a:schemeClr val="tx1"/>
+            </a:solidFill>
+          </a:ln>
+        </p:spPr>
+        <p:style>
+          <a:lnRef idx="2">
+            <a:schemeClr val="accent1">
+              <a:shade val="50000"/>
+            </a:schemeClr>
+          </a:lnRef>
+          <a:fillRef idx="1">
+            <a:schemeClr val="accent1"/>
+          </a:fillRef>
+          <a:effectRef idx="0">
+            <a:schemeClr val="accent1"/>
+          </a:effectRef>
+          <a:fontRef idx="minor">
+            <a:schemeClr val="lt1"/>
+          </a:fontRef>
+        </p:style>
+        <p:txBody>
+          <a:bodyPr rtlCol="0" anchor="ctr"/>
+          <a:lstStyle/>
+          <a:p>
+            <a:pPr algn="ctr"/>
+            <a:r>
+              <a:rPr lang="ko-KR" altLang="en-US" dirty="0">
+                <a:solidFill>
+                  <a:schemeClr val="tx1"/>
+                </a:solidFill>
+              </a:rPr>
+              <a:t>정보</a:t>
+            </a:r>
+            <a:r>
+              <a:rPr lang="en-US" altLang="ko-KR" dirty="0">
+                <a:solidFill>
+                  <a:schemeClr val="tx1"/>
+                </a:solidFill>
+              </a:rPr>
+              <a:t>2</a:t>
+            </a:r>
+            <a:endParaRPr lang="ko-KR" altLang="en-US" dirty="0">
+              <a:solidFill>
+                <a:schemeClr val="tx1"/>
+              </a:solidFill>
+            </a:endParaRPr>
+          </a:p>
+        </p:txBody>
+      </p:sp>
+      <p:sp>
+        <p:nvSpPr>
+          <p:cNvPr id="32" name="직사각형 31">
+            <a:extLst>
+              <a:ext uri="{FF2B5EF4-FFF2-40B4-BE49-F238E27FC236}">
+                <a16:creationId xmlns:a16="http://schemas.microsoft.com/office/drawing/2014/main" id="{99E97F52-9B1B-4C4B-A979-0865EEC1A1C1}"/>
+              </a:ext>
+            </a:extLst>
+          </p:cNvPr>
+          <p:cNvSpPr/>
+          <p:nvPr/>
+        </p:nvSpPr>
+        <p:spPr>
+          <a:xfrm>
+            <a:off x="3756735" y="5096916"/>
+            <a:ext cx="1264476" cy="436691"/>
+          </a:xfrm>
+          <a:prstGeom prst="rect">
+            <a:avLst/>
+          </a:prstGeom>
+          <a:solidFill>
+            <a:schemeClr val="bg1"/>
+          </a:solidFill>
+          <a:ln>
+            <a:solidFill>
+              <a:schemeClr val="tx1"/>
+            </a:solidFill>
+          </a:ln>
+        </p:spPr>
+        <p:style>
+          <a:lnRef idx="2">
+            <a:schemeClr val="accent1">
+              <a:shade val="50000"/>
+            </a:schemeClr>
+          </a:lnRef>
+          <a:fillRef idx="1">
+            <a:schemeClr val="accent1"/>
+          </a:fillRef>
+          <a:effectRef idx="0">
+            <a:schemeClr val="accent1"/>
+          </a:effectRef>
+          <a:fontRef idx="minor">
+            <a:schemeClr val="lt1"/>
+          </a:fontRef>
+        </p:style>
+        <p:txBody>
+          <a:bodyPr rtlCol="0" anchor="ctr"/>
+          <a:lstStyle/>
+          <a:p>
+            <a:pPr algn="ctr"/>
+            <a:r>
+              <a:rPr lang="ko-KR" altLang="en-US" dirty="0">
+                <a:solidFill>
+                  <a:schemeClr val="tx1"/>
+                </a:solidFill>
+              </a:rPr>
+              <a:t>정보</a:t>
+            </a:r>
+            <a:r>
+              <a:rPr lang="en-US" altLang="ko-KR" dirty="0">
+                <a:solidFill>
+                  <a:schemeClr val="tx1"/>
+                </a:solidFill>
+              </a:rPr>
+              <a:t>3</a:t>
+            </a:r>
+            <a:endParaRPr lang="ko-KR" altLang="en-US" dirty="0">
+              <a:solidFill>
+                <a:schemeClr val="tx1"/>
+              </a:solidFill>
+            </a:endParaRPr>
+          </a:p>
+        </p:txBody>
+      </p:sp>
+      <p:pic>
+        <p:nvPicPr>
+          <p:cNvPr id="33" name="Picture 2" descr="스크롤바 이미지 - 게티이미지뱅크">
+            <a:extLst>
+              <a:ext uri="{FF2B5EF4-FFF2-40B4-BE49-F238E27FC236}">
+                <a16:creationId xmlns:a16="http://schemas.microsoft.com/office/drawing/2014/main" id="{14930F4D-5CEC-4F7D-8A1E-4FC16551F953}"/>
+              </a:ext>
+            </a:extLst>
+          </p:cNvPr>
+          <p:cNvPicPr>
+            <a:picLocks noChangeAspect="1" noChangeArrowheads="1"/>
+          </p:cNvPicPr>
+          <p:nvPr/>
+        </p:nvPicPr>
+        <p:blipFill rotWithShape="1">
+          <a:blip r:embed="rId3">
+            <a:extLst>
+              <a:ext uri="{28A0092B-C50C-407E-A947-70E740481C1C}">
+                <a14:useLocalDpi xmlns:a14="http://schemas.microsoft.com/office/drawing/2010/main" val="0"/>
+              </a:ext>
+            </a:extLst>
+          </a:blip>
+          <a:srcRect l="59303" t="1819" r="32418" b="3298"/>
+          <a:stretch/>
+        </p:blipFill>
+        <p:spPr bwMode="auto">
+          <a:xfrm>
+            <a:off x="8371673" y="2654387"/>
+            <a:ext cx="217764" cy="2830087"/>
+          </a:xfrm>
+          <a:prstGeom prst="rect">
+            <a:avLst/>
+          </a:prstGeom>
+          <a:noFill/>
+          <a:extLst>
+            <a:ext uri="{909E8E84-426E-40DD-AFC4-6F175D3DCCD1}">
+              <a14:hiddenFill xmlns:a14="http://schemas.microsoft.com/office/drawing/2010/main">
+                <a:solidFill>
+                  <a:srgbClr val="FFFFFF"/>
+                </a:solidFill>
+              </a14:hiddenFill>
+            </a:ext>
+          </a:extLst>
+        </p:spPr>
+      </p:pic>
+      <p:sp>
+        <p:nvSpPr>
+          <p:cNvPr id="34" name="직사각형 33">
+            <a:extLst>
+              <a:ext uri="{FF2B5EF4-FFF2-40B4-BE49-F238E27FC236}">
+                <a16:creationId xmlns:a16="http://schemas.microsoft.com/office/drawing/2014/main" id="{3B3A93C1-7C4F-419A-8AE1-6C83D75E7129}"/>
+              </a:ext>
+            </a:extLst>
+          </p:cNvPr>
+          <p:cNvSpPr/>
+          <p:nvPr/>
+        </p:nvSpPr>
+        <p:spPr>
+          <a:xfrm>
+            <a:off x="5056123" y="2619591"/>
+            <a:ext cx="2956133" cy="2914016"/>
+          </a:xfrm>
+          <a:prstGeom prst="rect">
+            <a:avLst/>
+          </a:prstGeom>
+          <a:solidFill>
+            <a:schemeClr val="bg1"/>
+          </a:solidFill>
+          <a:ln>
+            <a:solidFill>
+              <a:schemeClr val="tx1"/>
+            </a:solidFill>
+          </a:ln>
+        </p:spPr>
+        <p:style>
+          <a:lnRef idx="2">
+            <a:schemeClr val="accent1">
+              <a:shade val="50000"/>
+            </a:schemeClr>
+          </a:lnRef>
+          <a:fillRef idx="1">
+            <a:schemeClr val="accent1"/>
+          </a:fillRef>
+          <a:effectRef idx="0">
+            <a:schemeClr val="accent1"/>
+          </a:effectRef>
+          <a:fontRef idx="minor">
+            <a:schemeClr val="lt1"/>
+          </a:fontRef>
+        </p:style>
+        <p:txBody>
+          <a:bodyPr rtlCol="0" anchor="ctr"/>
+          <a:lstStyle/>
+          <a:p>
+            <a:pPr algn="ctr"/>
+            <a:r>
+              <a:rPr lang="ko-KR" altLang="en-US" dirty="0">
+                <a:solidFill>
+                  <a:schemeClr val="tx1"/>
+                </a:solidFill>
+              </a:rPr>
+              <a:t>내용 영역</a:t>
+            </a:r>
+          </a:p>
+        </p:txBody>
+      </p:sp>
+      <p:sp>
+        <p:nvSpPr>
+          <p:cNvPr id="36" name="직사각형 35">
+            <a:extLst>
+              <a:ext uri="{FF2B5EF4-FFF2-40B4-BE49-F238E27FC236}">
+                <a16:creationId xmlns:a16="http://schemas.microsoft.com/office/drawing/2014/main" id="{2E1F74D7-6A5E-4C36-9CE7-DD503F024231}"/>
+              </a:ext>
+            </a:extLst>
+          </p:cNvPr>
+          <p:cNvSpPr/>
+          <p:nvPr/>
+        </p:nvSpPr>
+        <p:spPr>
+          <a:xfrm>
+            <a:off x="3768910" y="5602408"/>
+            <a:ext cx="1264476" cy="436691"/>
+          </a:xfrm>
+          <a:prstGeom prst="rect">
+            <a:avLst/>
+          </a:prstGeom>
+          <a:solidFill>
+            <a:schemeClr val="bg1"/>
+          </a:solidFill>
+          <a:ln>
+            <a:solidFill>
+              <a:schemeClr val="tx1"/>
+            </a:solidFill>
+          </a:ln>
+        </p:spPr>
+        <p:style>
+          <a:lnRef idx="2">
+            <a:schemeClr val="accent1">
+              <a:shade val="50000"/>
+            </a:schemeClr>
+          </a:lnRef>
+          <a:fillRef idx="1">
+            <a:schemeClr val="accent1"/>
+          </a:fillRef>
+          <a:effectRef idx="0">
+            <a:schemeClr val="accent1"/>
+          </a:effectRef>
+          <a:fontRef idx="minor">
+            <a:schemeClr val="lt1"/>
+          </a:fontRef>
+        </p:style>
+        <p:txBody>
+          <a:bodyPr rtlCol="0" anchor="ctr"/>
+          <a:lstStyle/>
+          <a:p>
+            <a:pPr algn="ctr"/>
+            <a:r>
+              <a:rPr lang="ko-KR" altLang="en-US" dirty="0">
+                <a:solidFill>
+                  <a:schemeClr val="tx1"/>
+                </a:solidFill>
+              </a:rPr>
+              <a:t>회원등급</a:t>
+            </a:r>
+          </a:p>
+        </p:txBody>
+      </p:sp>
+      <p:pic>
+        <p:nvPicPr>
+          <p:cNvPr id="1026" name="Picture 2" descr="라디오 버튼 - 무료 상호 작용개 아이콘">
+            <a:extLst>
+              <a:ext uri="{FF2B5EF4-FFF2-40B4-BE49-F238E27FC236}">
+                <a16:creationId xmlns:a16="http://schemas.microsoft.com/office/drawing/2014/main" id="{B962340F-A8E6-4851-B011-C107A419E220}"/>
+              </a:ext>
+            </a:extLst>
+          </p:cNvPr>
+          <p:cNvPicPr>
+            <a:picLocks noChangeAspect="1" noChangeArrowheads="1"/>
+          </p:cNvPicPr>
+          <p:nvPr/>
+        </p:nvPicPr>
+        <p:blipFill>
+          <a:blip r:embed="rId4">
+            <a:extLst>
+              <a:ext uri="{28A0092B-C50C-407E-A947-70E740481C1C}">
+                <a14:useLocalDpi xmlns:a14="http://schemas.microsoft.com/office/drawing/2010/main" val="0"/>
+              </a:ext>
+            </a:extLst>
+          </a:blip>
+          <a:srcRect/>
+          <a:stretch>
+            <a:fillRect/>
+          </a:stretch>
+        </p:blipFill>
+        <p:spPr bwMode="auto">
+          <a:xfrm>
+            <a:off x="5164936" y="5729941"/>
+            <a:ext cx="284721" cy="284721"/>
+          </a:xfrm>
+          <a:prstGeom prst="rect">
+            <a:avLst/>
+          </a:prstGeom>
+          <a:noFill/>
+          <a:extLst>
+            <a:ext uri="{909E8E84-426E-40DD-AFC4-6F175D3DCCD1}">
+              <a14:hiddenFill xmlns:a14="http://schemas.microsoft.com/office/drawing/2010/main">
+                <a:solidFill>
+                  <a:srgbClr val="FFFFFF"/>
+                </a:solidFill>
+              </a14:hiddenFill>
+            </a:ext>
+          </a:extLst>
+        </p:spPr>
+      </p:pic>
+      <p:sp>
+        <p:nvSpPr>
+          <p:cNvPr id="8" name="TextBox 7">
+            <a:extLst>
+              <a:ext uri="{FF2B5EF4-FFF2-40B4-BE49-F238E27FC236}">
+                <a16:creationId xmlns:a16="http://schemas.microsoft.com/office/drawing/2014/main" id="{683385B2-F2C1-4557-B7B7-E06645F972E5}"/>
+              </a:ext>
+            </a:extLst>
+          </p:cNvPr>
+          <p:cNvSpPr txBox="1"/>
+          <p:nvPr/>
+        </p:nvSpPr>
+        <p:spPr>
+          <a:xfrm>
+            <a:off x="5374786" y="5691621"/>
+            <a:ext cx="646331" cy="369332"/>
+          </a:xfrm>
+          <a:prstGeom prst="rect">
+            <a:avLst/>
+          </a:prstGeom>
+          <a:noFill/>
+        </p:spPr>
+        <p:txBody>
+          <a:bodyPr wrap="none" rtlCol="0">
+            <a:spAutoFit/>
+          </a:bodyPr>
+          <a:lstStyle/>
+          <a:p>
+            <a:r>
+              <a:rPr lang="ko-KR" altLang="en-US"/>
+              <a:t>일반</a:t>
+            </a:r>
+          </a:p>
+        </p:txBody>
+      </p:sp>
+      <p:sp>
+        <p:nvSpPr>
+          <p:cNvPr id="38" name="TextBox 37">
+            <a:extLst>
+              <a:ext uri="{FF2B5EF4-FFF2-40B4-BE49-F238E27FC236}">
+                <a16:creationId xmlns:a16="http://schemas.microsoft.com/office/drawing/2014/main" id="{D28FA4E8-F061-40A5-BFCA-7FEEC9C8FFED}"/>
+              </a:ext>
+            </a:extLst>
+          </p:cNvPr>
+          <p:cNvSpPr txBox="1"/>
+          <p:nvPr/>
+        </p:nvSpPr>
+        <p:spPr>
+          <a:xfrm>
+            <a:off x="7149781" y="5691621"/>
+            <a:ext cx="877163" cy="369332"/>
+          </a:xfrm>
+          <a:prstGeom prst="rect">
+            <a:avLst/>
+          </a:prstGeom>
+          <a:noFill/>
+        </p:spPr>
+        <p:txBody>
+          <a:bodyPr wrap="none" rtlCol="0">
+            <a:spAutoFit/>
+          </a:bodyPr>
+          <a:lstStyle/>
+          <a:p>
+            <a:r>
+              <a:rPr lang="ko-KR" altLang="en-US" dirty="0"/>
+              <a:t>관리자</a:t>
+            </a:r>
+          </a:p>
+        </p:txBody>
+      </p:sp>
+      <p:pic>
+        <p:nvPicPr>
+          <p:cNvPr id="1030" name="Picture 6" descr="RadioButton – Jetpack Compose Component in Material 3 Compose">
+            <a:extLst>
+              <a:ext uri="{FF2B5EF4-FFF2-40B4-BE49-F238E27FC236}">
+                <a16:creationId xmlns:a16="http://schemas.microsoft.com/office/drawing/2014/main" id="{861F03EC-7FFB-4F2F-950D-DF90CB2C178F}"/>
+              </a:ext>
+            </a:extLst>
+          </p:cNvPr>
+          <p:cNvPicPr>
+            <a:picLocks noChangeAspect="1" noChangeArrowheads="1"/>
+          </p:cNvPicPr>
+          <p:nvPr/>
+        </p:nvPicPr>
+        <p:blipFill rotWithShape="1">
+          <a:blip r:embed="rId5">
+            <a:extLst>
+              <a:ext uri="{28A0092B-C50C-407E-A947-70E740481C1C}">
+                <a14:useLocalDpi xmlns:a14="http://schemas.microsoft.com/office/drawing/2010/main" val="0"/>
+              </a:ext>
+            </a:extLst>
+          </a:blip>
+          <a:srcRect l="53924" t="46695" r="42212" b="46429"/>
+          <a:stretch/>
+        </p:blipFill>
+        <p:spPr bwMode="auto">
+          <a:xfrm>
+            <a:off x="6840150" y="5734016"/>
+            <a:ext cx="312426" cy="325772"/>
+          </a:xfrm>
+          <a:prstGeom prst="rect">
+            <a:avLst/>
+          </a:prstGeom>
+          <a:noFill/>
+          <a:extLst>
+            <a:ext uri="{909E8E84-426E-40DD-AFC4-6F175D3DCCD1}">
+              <a14:hiddenFill xmlns:a14="http://schemas.microsoft.com/office/drawing/2010/main">
+                <a:solidFill>
+                  <a:srgbClr val="FFFFFF"/>
+                </a:solidFill>
+              </a14:hiddenFill>
+            </a:ext>
+          </a:extLst>
+        </p:spPr>
+      </p:pic>
+    </p:spTree>
+    <p:extLst>
+      <p:ext uri="{BB962C8B-B14F-4D97-AF65-F5344CB8AC3E}">
+        <p14:creationId xmlns:p14="http://schemas.microsoft.com/office/powerpoint/2010/main" val="3360028528"/>
+      </p:ext>
+    </p:extLst>
+  </p:cSld>
+  <p:clrMapOvr>
+    <a:masterClrMapping/>
+  </p:clrMapOvr>
+</p:sld>
+</file>
+
+<file path=ppt/slides/slide19.xml><?xml version="1.0" encoding="utf-8"?>
+<p:sld xmlns:a="http://schemas.openxmlformats.org/drawingml/2006/main" xmlns:r="http://schemas.openxmlformats.org/officeDocument/2006/relationships" xmlns:p="http://schemas.openxmlformats.org/presentationml/2006/main">
+  <p:cSld>
+    <p:spTree>
+      <p:nvGrpSpPr>
+        <p:cNvPr id="1" name=""/>
+        <p:cNvGrpSpPr/>
+        <p:nvPr/>
+      </p:nvGrpSpPr>
+      <p:grpSpPr>
+        <a:xfrm>
+          <a:off x="0" y="0"/>
+          <a:ext cx="0" cy="0"/>
+          <a:chOff x="0" y="0"/>
+          <a:chExt cx="0" cy="0"/>
+        </a:xfrm>
+      </p:grpSpPr>
+      <p:sp>
+        <p:nvSpPr>
+          <p:cNvPr id="3" name="사각형: 둥근 모서리 2">
+            <a:extLst>
+              <a:ext uri="{FF2B5EF4-FFF2-40B4-BE49-F238E27FC236}">
+                <a16:creationId xmlns:a16="http://schemas.microsoft.com/office/drawing/2014/main" id="{F9D81498-7312-4545-8891-2C080EDD3FED}"/>
+              </a:ext>
+            </a:extLst>
+          </p:cNvPr>
+          <p:cNvSpPr/>
+          <p:nvPr/>
+        </p:nvSpPr>
+        <p:spPr>
+          <a:xfrm>
+            <a:off x="73866" y="78910"/>
+            <a:ext cx="2870670" cy="332151"/>
+          </a:xfrm>
+          <a:prstGeom prst="roundRect">
+            <a:avLst/>
+          </a:prstGeom>
+        </p:spPr>
+        <p:style>
+          <a:lnRef idx="2">
+            <a:schemeClr val="dk1"/>
+          </a:lnRef>
+          <a:fillRef idx="1">
+            <a:schemeClr val="lt1"/>
+          </a:fillRef>
+          <a:effectRef idx="0">
+            <a:schemeClr val="dk1"/>
+          </a:effectRef>
+          <a:fontRef idx="minor">
+            <a:schemeClr val="dk1"/>
+          </a:fontRef>
+        </p:style>
+        <p:txBody>
+          <a:bodyPr rtlCol="0" anchor="ctr"/>
+          <a:lstStyle/>
+          <a:p>
+            <a:pPr algn="ctr"/>
+            <a:r>
+              <a:rPr lang="ko-KR" altLang="en-US" dirty="0"/>
+              <a:t>관리자 페이지</a:t>
+            </a:r>
+            <a:r>
+              <a:rPr lang="en-US" altLang="ko-KR" dirty="0"/>
+              <a:t>-</a:t>
+            </a:r>
+            <a:r>
+              <a:rPr lang="ko-KR" altLang="en-US" dirty="0"/>
+              <a:t>회원관리</a:t>
+            </a:r>
+          </a:p>
+        </p:txBody>
+      </p:sp>
+      <p:grpSp>
+        <p:nvGrpSpPr>
+          <p:cNvPr id="7" name="그룹 6">
+            <a:extLst>
+              <a:ext uri="{FF2B5EF4-FFF2-40B4-BE49-F238E27FC236}">
+                <a16:creationId xmlns:a16="http://schemas.microsoft.com/office/drawing/2014/main" id="{9C67A2EE-B9DB-4CB9-9D5B-C1521A05D19F}"/>
+              </a:ext>
+            </a:extLst>
+          </p:cNvPr>
+          <p:cNvGrpSpPr/>
+          <p:nvPr/>
+        </p:nvGrpSpPr>
+        <p:grpSpPr>
+          <a:xfrm>
+            <a:off x="2329649" y="835192"/>
+            <a:ext cx="7532702" cy="5187616"/>
+            <a:chOff x="2329649" y="835192"/>
+            <a:chExt cx="7532702" cy="5187616"/>
+          </a:xfrm>
+        </p:grpSpPr>
+        <p:pic>
+          <p:nvPicPr>
+            <p:cNvPr id="5" name="그림 4">
+              <a:extLst>
+                <a:ext uri="{FF2B5EF4-FFF2-40B4-BE49-F238E27FC236}">
+                  <a16:creationId xmlns:a16="http://schemas.microsoft.com/office/drawing/2014/main" id="{A903B686-C3E3-45C0-BFBD-CB994972AD1F}"/>
+                </a:ext>
+              </a:extLst>
+            </p:cNvPr>
+            <p:cNvPicPr>
+              <a:picLocks noChangeAspect="1"/>
+            </p:cNvPicPr>
+            <p:nvPr/>
+          </p:nvPicPr>
+          <p:blipFill>
+            <a:blip r:embed="rId2"/>
+            <a:stretch>
+              <a:fillRect/>
+            </a:stretch>
+          </p:blipFill>
+          <p:spPr>
+            <a:xfrm>
+              <a:off x="2329649" y="835192"/>
+              <a:ext cx="7532702" cy="5187616"/>
+            </a:xfrm>
+            <a:prstGeom prst="rect">
+              <a:avLst/>
+            </a:prstGeom>
+          </p:spPr>
+        </p:pic>
+        <p:sp>
+          <p:nvSpPr>
+            <p:cNvPr id="6" name="직사각형 5">
+              <a:extLst>
+                <a:ext uri="{FF2B5EF4-FFF2-40B4-BE49-F238E27FC236}">
+                  <a16:creationId xmlns:a16="http://schemas.microsoft.com/office/drawing/2014/main" id="{E7EA77AD-978C-40B6-824E-78AA15720973}"/>
+                </a:ext>
+              </a:extLst>
+            </p:cNvPr>
+            <p:cNvSpPr/>
+            <p:nvPr/>
+          </p:nvSpPr>
+          <p:spPr>
+            <a:xfrm>
+              <a:off x="2332139" y="1795244"/>
+              <a:ext cx="7524925" cy="4211273"/>
+            </a:xfrm>
+            <a:prstGeom prst="rect">
+              <a:avLst/>
+            </a:prstGeom>
+          </p:spPr>
+          <p:style>
+            <a:lnRef idx="2">
+              <a:schemeClr val="dk1"/>
+            </a:lnRef>
+            <a:fillRef idx="1">
+              <a:schemeClr val="lt1"/>
+            </a:fillRef>
+            <a:effectRef idx="0">
+              <a:schemeClr val="dk1"/>
+            </a:effectRef>
+            <a:fontRef idx="minor">
+              <a:schemeClr val="dk1"/>
+            </a:fontRef>
+          </p:style>
+          <p:txBody>
+            <a:bodyPr rtlCol="0" anchor="ctr"/>
+            <a:lstStyle/>
+            <a:p>
+              <a:pPr algn="ctr"/>
+              <a:endParaRPr lang="ko-KR" altLang="en-US" dirty="0"/>
+            </a:p>
+          </p:txBody>
+        </p:sp>
+      </p:grpSp>
+      <p:sp>
+        <p:nvSpPr>
+          <p:cNvPr id="16" name="직사각형 15">
+            <a:extLst>
+              <a:ext uri="{FF2B5EF4-FFF2-40B4-BE49-F238E27FC236}">
+                <a16:creationId xmlns:a16="http://schemas.microsoft.com/office/drawing/2014/main" id="{34D15001-F4B4-4A25-85F1-5125EE2E8969}"/>
+              </a:ext>
+            </a:extLst>
+          </p:cNvPr>
+          <p:cNvSpPr/>
+          <p:nvPr/>
+        </p:nvSpPr>
+        <p:spPr>
+          <a:xfrm>
+            <a:off x="260057" y="1310081"/>
+            <a:ext cx="1890320" cy="379602"/>
+          </a:xfrm>
+          <a:prstGeom prst="rect">
+            <a:avLst/>
+          </a:prstGeom>
+          <a:scene3d>
+            <a:camera prst="orthographicFront"/>
+            <a:lightRig rig="threePt" dir="t"/>
+          </a:scene3d>
+          <a:sp3d>
+            <a:bevelT prst="relaxedInset"/>
+          </a:sp3d>
+        </p:spPr>
+        <p:style>
+          <a:lnRef idx="2">
+            <a:schemeClr val="dk1"/>
+          </a:lnRef>
+          <a:fillRef idx="1">
+            <a:schemeClr val="lt1"/>
+          </a:fillRef>
+          <a:effectRef idx="0">
+            <a:schemeClr val="dk1"/>
+          </a:effectRef>
+          <a:fontRef idx="minor">
+            <a:schemeClr val="dk1"/>
+          </a:fontRef>
+        </p:style>
+        <p:txBody>
+          <a:bodyPr rtlCol="0" anchor="ctr"/>
+          <a:lstStyle/>
+          <a:p>
+            <a:pPr algn="ctr"/>
+            <a:r>
+              <a:rPr lang="ko-KR" altLang="en-US" dirty="0" err="1"/>
+              <a:t>입력창</a:t>
+            </a:r>
+            <a:endParaRPr lang="ko-KR" altLang="en-US" dirty="0"/>
+          </a:p>
+        </p:txBody>
+      </p:sp>
+      <p:sp>
+        <p:nvSpPr>
+          <p:cNvPr id="17" name="사각형: 둥근 모서리 16">
+            <a:extLst>
+              <a:ext uri="{FF2B5EF4-FFF2-40B4-BE49-F238E27FC236}">
+                <a16:creationId xmlns:a16="http://schemas.microsoft.com/office/drawing/2014/main" id="{38EE6A1E-3B15-4966-BC87-D2EBB39CB8B2}"/>
+              </a:ext>
+            </a:extLst>
+          </p:cNvPr>
+          <p:cNvSpPr/>
+          <p:nvPr/>
+        </p:nvSpPr>
+        <p:spPr>
+          <a:xfrm>
+            <a:off x="260057" y="1795244"/>
+            <a:ext cx="1350630" cy="332151"/>
+          </a:xfrm>
+          <a:prstGeom prst="roundRect">
+            <a:avLst/>
+          </a:prstGeom>
+          <a:scene3d>
+            <a:camera prst="orthographicFront"/>
+            <a:lightRig rig="threePt" dir="t"/>
+          </a:scene3d>
+          <a:sp3d>
+            <a:bevelT/>
+          </a:sp3d>
+        </p:spPr>
+        <p:style>
+          <a:lnRef idx="2">
+            <a:schemeClr val="dk1"/>
+          </a:lnRef>
+          <a:fillRef idx="1">
+            <a:schemeClr val="lt1"/>
+          </a:fillRef>
+          <a:effectRef idx="0">
+            <a:schemeClr val="dk1"/>
+          </a:effectRef>
+          <a:fontRef idx="minor">
+            <a:schemeClr val="dk1"/>
+          </a:fontRef>
+        </p:style>
+        <p:txBody>
+          <a:bodyPr rtlCol="0" anchor="ctr"/>
+          <a:lstStyle/>
+          <a:p>
+            <a:pPr algn="ctr"/>
+            <a:r>
+              <a:rPr lang="ko-KR" altLang="en-US" dirty="0"/>
+              <a:t>버튼</a:t>
+            </a:r>
+          </a:p>
+        </p:txBody>
+      </p:sp>
+      <p:sp>
+        <p:nvSpPr>
+          <p:cNvPr id="12" name="사각형: 둥근 모서리 11">
+            <a:extLst>
+              <a:ext uri="{FF2B5EF4-FFF2-40B4-BE49-F238E27FC236}">
+                <a16:creationId xmlns:a16="http://schemas.microsoft.com/office/drawing/2014/main" id="{53223CA0-9F22-43FA-BFF0-5B29D4CFEC17}"/>
+              </a:ext>
+            </a:extLst>
+          </p:cNvPr>
+          <p:cNvSpPr/>
+          <p:nvPr/>
+        </p:nvSpPr>
+        <p:spPr>
+          <a:xfrm>
+            <a:off x="4092152" y="1960133"/>
+            <a:ext cx="1350630" cy="332151"/>
+          </a:xfrm>
+          <a:prstGeom prst="roundRect">
+            <a:avLst/>
+          </a:prstGeom>
+          <a:noFill/>
+          <a:scene3d>
+            <a:camera prst="orthographicFront"/>
+            <a:lightRig rig="threePt" dir="t"/>
+          </a:scene3d>
+          <a:sp3d>
+            <a:bevelT/>
+          </a:sp3d>
+        </p:spPr>
+        <p:style>
+          <a:lnRef idx="2">
+            <a:schemeClr val="dk1"/>
+          </a:lnRef>
+          <a:fillRef idx="1">
+            <a:schemeClr val="lt1"/>
+          </a:fillRef>
+          <a:effectRef idx="0">
+            <a:schemeClr val="dk1"/>
+          </a:effectRef>
+          <a:fontRef idx="minor">
+            <a:schemeClr val="dk1"/>
+          </a:fontRef>
+        </p:style>
+        <p:txBody>
+          <a:bodyPr rtlCol="0" anchor="ctr"/>
+          <a:lstStyle/>
+          <a:p>
+            <a:pPr algn="ctr"/>
+            <a:r>
+              <a:rPr lang="ko-KR" altLang="en-US" dirty="0"/>
+              <a:t>회원 관리</a:t>
+            </a:r>
+          </a:p>
+        </p:txBody>
+      </p:sp>
+      <p:sp>
+        <p:nvSpPr>
+          <p:cNvPr id="13" name="사각형: 둥근 모서리 12">
+            <a:extLst>
+              <a:ext uri="{FF2B5EF4-FFF2-40B4-BE49-F238E27FC236}">
+                <a16:creationId xmlns:a16="http://schemas.microsoft.com/office/drawing/2014/main" id="{AC0B99E6-C7CE-4EAE-8D86-EA644D113C96}"/>
+              </a:ext>
+            </a:extLst>
+          </p:cNvPr>
+          <p:cNvSpPr/>
+          <p:nvPr/>
+        </p:nvSpPr>
+        <p:spPr>
+          <a:xfrm>
+            <a:off x="2538519" y="1960133"/>
+            <a:ext cx="1483149" cy="332151"/>
+          </a:xfrm>
+          <a:prstGeom prst="roundRect">
+            <a:avLst/>
+          </a:prstGeom>
+          <a:noFill/>
+          <a:scene3d>
+            <a:camera prst="orthographicFront"/>
+            <a:lightRig rig="threePt" dir="t"/>
+          </a:scene3d>
+          <a:sp3d>
+            <a:bevelT/>
+          </a:sp3d>
+        </p:spPr>
+        <p:style>
+          <a:lnRef idx="2">
+            <a:schemeClr val="dk1"/>
+          </a:lnRef>
+          <a:fillRef idx="1">
+            <a:schemeClr val="lt1"/>
+          </a:fillRef>
+          <a:effectRef idx="0">
+            <a:schemeClr val="dk1"/>
+          </a:effectRef>
+          <a:fontRef idx="minor">
+            <a:schemeClr val="dk1"/>
+          </a:fontRef>
+        </p:style>
+        <p:txBody>
+          <a:bodyPr rtlCol="0" anchor="ctr"/>
+          <a:lstStyle/>
+          <a:p>
+            <a:pPr algn="ctr"/>
+            <a:r>
+              <a:rPr lang="ko-KR" altLang="en-US" dirty="0"/>
+              <a:t>방문자 관리</a:t>
+            </a:r>
+          </a:p>
+        </p:txBody>
+      </p:sp>
+      <p:sp>
+        <p:nvSpPr>
+          <p:cNvPr id="14" name="사각형: 둥근 모서리 13">
+            <a:extLst>
+              <a:ext uri="{FF2B5EF4-FFF2-40B4-BE49-F238E27FC236}">
+                <a16:creationId xmlns:a16="http://schemas.microsoft.com/office/drawing/2014/main" id="{F9BA5A55-42CD-4233-BF84-B585B606AD45}"/>
+              </a:ext>
+            </a:extLst>
+          </p:cNvPr>
+          <p:cNvSpPr/>
+          <p:nvPr/>
+        </p:nvSpPr>
+        <p:spPr>
+          <a:xfrm>
+            <a:off x="5513267" y="1961319"/>
+            <a:ext cx="1890320" cy="332151"/>
+          </a:xfrm>
+          <a:prstGeom prst="roundRect">
+            <a:avLst/>
+          </a:prstGeom>
+          <a:solidFill>
+            <a:srgbClr val="FFC000"/>
+          </a:solidFill>
+          <a:scene3d>
+            <a:camera prst="orthographicFront"/>
+            <a:lightRig rig="threePt" dir="t"/>
+          </a:scene3d>
+          <a:sp3d>
+            <a:bevelT/>
+          </a:sp3d>
+        </p:spPr>
+        <p:style>
+          <a:lnRef idx="2">
+            <a:schemeClr val="dk1"/>
+          </a:lnRef>
+          <a:fillRef idx="1">
+            <a:schemeClr val="lt1"/>
+          </a:fillRef>
+          <a:effectRef idx="0">
+            <a:schemeClr val="dk1"/>
+          </a:effectRef>
+          <a:fontRef idx="minor">
+            <a:schemeClr val="dk1"/>
+          </a:fontRef>
+        </p:style>
+        <p:txBody>
+          <a:bodyPr rtlCol="0" anchor="ctr"/>
+          <a:lstStyle/>
+          <a:p>
+            <a:pPr algn="ctr"/>
+            <a:r>
+              <a:rPr lang="ko-KR" altLang="en-US" dirty="0"/>
+              <a:t>디저트 관리</a:t>
+            </a:r>
+          </a:p>
+        </p:txBody>
+      </p:sp>
+      <p:pic>
+        <p:nvPicPr>
+          <p:cNvPr id="23" name="Picture 2" descr="스크롤바 이미지 - 게티이미지뱅크">
+            <a:extLst>
+              <a:ext uri="{FF2B5EF4-FFF2-40B4-BE49-F238E27FC236}">
+                <a16:creationId xmlns:a16="http://schemas.microsoft.com/office/drawing/2014/main" id="{A893E749-20E4-4CDC-83EC-9F55ED7942D3}"/>
+              </a:ext>
+            </a:extLst>
+          </p:cNvPr>
+          <p:cNvPicPr>
+            <a:picLocks noChangeAspect="1" noChangeArrowheads="1"/>
+          </p:cNvPicPr>
+          <p:nvPr/>
+        </p:nvPicPr>
+        <p:blipFill rotWithShape="1">
+          <a:blip r:embed="rId3">
+            <a:extLst>
+              <a:ext uri="{28A0092B-C50C-407E-A947-70E740481C1C}">
+                <a14:useLocalDpi xmlns:a14="http://schemas.microsoft.com/office/drawing/2010/main" val="0"/>
+              </a:ext>
+            </a:extLst>
+          </a:blip>
+          <a:srcRect l="59303" t="1819" r="32418" b="3298"/>
+          <a:stretch/>
+        </p:blipFill>
+        <p:spPr bwMode="auto">
+          <a:xfrm>
+            <a:off x="9639300" y="2914376"/>
+            <a:ext cx="217764" cy="2830087"/>
+          </a:xfrm>
+          <a:prstGeom prst="rect">
+            <a:avLst/>
+          </a:prstGeom>
+          <a:noFill/>
+          <a:extLst>
+            <a:ext uri="{909E8E84-426E-40DD-AFC4-6F175D3DCCD1}">
+              <a14:hiddenFill xmlns:a14="http://schemas.microsoft.com/office/drawing/2010/main">
+                <a:solidFill>
+                  <a:srgbClr val="FFFFFF"/>
+                </a:solidFill>
+              </a14:hiddenFill>
+            </a:ext>
+          </a:extLst>
+        </p:spPr>
+      </p:pic>
+      <p:sp>
+        <p:nvSpPr>
+          <p:cNvPr id="19" name="사각형: 둥근 모서리 18">
+            <a:extLst>
+              <a:ext uri="{FF2B5EF4-FFF2-40B4-BE49-F238E27FC236}">
+                <a16:creationId xmlns:a16="http://schemas.microsoft.com/office/drawing/2014/main" id="{CE56F1B8-6CE8-49F2-A0AC-213158F85A59}"/>
+              </a:ext>
+            </a:extLst>
+          </p:cNvPr>
+          <p:cNvSpPr/>
+          <p:nvPr/>
+        </p:nvSpPr>
+        <p:spPr>
+          <a:xfrm>
+            <a:off x="7474072" y="1970524"/>
+            <a:ext cx="1350630" cy="332151"/>
+          </a:xfrm>
+          <a:prstGeom prst="roundRect">
+            <a:avLst/>
+          </a:prstGeom>
+          <a:noFill/>
+          <a:scene3d>
+            <a:camera prst="orthographicFront"/>
+            <a:lightRig rig="threePt" dir="t"/>
+          </a:scene3d>
+          <a:sp3d>
+            <a:bevelT/>
+          </a:sp3d>
+        </p:spPr>
+        <p:style>
+          <a:lnRef idx="2">
+            <a:schemeClr val="dk1"/>
+          </a:lnRef>
+          <a:fillRef idx="1">
+            <a:schemeClr val="lt1"/>
+          </a:fillRef>
+          <a:effectRef idx="0">
+            <a:schemeClr val="dk1"/>
+          </a:effectRef>
+          <a:fontRef idx="minor">
+            <a:schemeClr val="dk1"/>
+          </a:fontRef>
+        </p:style>
+        <p:txBody>
+          <a:bodyPr rtlCol="0" anchor="ctr"/>
+          <a:lstStyle/>
+          <a:p>
+            <a:pPr algn="ctr"/>
+            <a:r>
+              <a:rPr lang="ko-KR" altLang="en-US" dirty="0"/>
+              <a:t>카페 관리</a:t>
+            </a:r>
+          </a:p>
+        </p:txBody>
+      </p:sp>
+      <p:grpSp>
+        <p:nvGrpSpPr>
+          <p:cNvPr id="20" name="그룹 19">
+            <a:extLst>
+              <a:ext uri="{FF2B5EF4-FFF2-40B4-BE49-F238E27FC236}">
+                <a16:creationId xmlns:a16="http://schemas.microsoft.com/office/drawing/2014/main" id="{20AD2D80-93B4-44D6-9FB4-7B665B0EF58D}"/>
+              </a:ext>
+            </a:extLst>
+          </p:cNvPr>
+          <p:cNvGrpSpPr/>
+          <p:nvPr/>
+        </p:nvGrpSpPr>
+        <p:grpSpPr>
+          <a:xfrm>
+            <a:off x="2324100" y="2807326"/>
+            <a:ext cx="7150099" cy="379602"/>
+            <a:chOff x="3978734" y="2546911"/>
+            <a:chExt cx="3061027" cy="379602"/>
+          </a:xfrm>
+        </p:grpSpPr>
+        <p:sp>
+          <p:nvSpPr>
+            <p:cNvPr id="21" name="직사각형 20">
+              <a:extLst>
+                <a:ext uri="{FF2B5EF4-FFF2-40B4-BE49-F238E27FC236}">
+                  <a16:creationId xmlns:a16="http://schemas.microsoft.com/office/drawing/2014/main" id="{7CE7867B-0E34-403C-9995-738FE527D0E6}"/>
+                </a:ext>
+              </a:extLst>
+            </p:cNvPr>
+            <p:cNvSpPr/>
+            <p:nvPr/>
+          </p:nvSpPr>
+          <p:spPr>
+            <a:xfrm>
+              <a:off x="4487549" y="2546911"/>
+              <a:ext cx="2552212" cy="379602"/>
+            </a:xfrm>
+            <a:prstGeom prst="rect">
+              <a:avLst/>
+            </a:prstGeom>
+            <a:scene3d>
+              <a:camera prst="orthographicFront"/>
+              <a:lightRig rig="threePt" dir="t"/>
+            </a:scene3d>
+            <a:sp3d>
+              <a:bevelT prst="relaxedInset"/>
+            </a:sp3d>
+          </p:spPr>
+          <p:style>
+            <a:lnRef idx="2">
+              <a:schemeClr val="dk1"/>
+            </a:lnRef>
+            <a:fillRef idx="1">
+              <a:schemeClr val="lt1"/>
+            </a:fillRef>
+            <a:effectRef idx="0">
+              <a:schemeClr val="dk1"/>
+            </a:effectRef>
+            <a:fontRef idx="minor">
+              <a:schemeClr val="dk1"/>
+            </a:fontRef>
+          </p:style>
+          <p:txBody>
+            <a:bodyPr rtlCol="0" anchor="ctr"/>
+            <a:lstStyle/>
+            <a:p>
+              <a:pPr algn="ctr"/>
+              <a:r>
+                <a:rPr lang="ko-KR" altLang="en-US" dirty="0" err="1"/>
+                <a:t>입력창</a:t>
+              </a:r>
+              <a:endParaRPr lang="ko-KR" altLang="en-US" dirty="0"/>
+            </a:p>
+          </p:txBody>
+        </p:sp>
+        <p:sp>
+          <p:nvSpPr>
+            <p:cNvPr id="22" name="직사각형 21">
+              <a:extLst>
+                <a:ext uri="{FF2B5EF4-FFF2-40B4-BE49-F238E27FC236}">
+                  <a16:creationId xmlns:a16="http://schemas.microsoft.com/office/drawing/2014/main" id="{F568EE5C-CF58-4C08-9844-F18B40E47E0E}"/>
+                </a:ext>
+              </a:extLst>
+            </p:cNvPr>
+            <p:cNvSpPr/>
+            <p:nvPr/>
+          </p:nvSpPr>
+          <p:spPr>
+            <a:xfrm>
+              <a:off x="3978734" y="2556349"/>
+              <a:ext cx="657875" cy="360727"/>
+            </a:xfrm>
+            <a:prstGeom prst="rect">
+              <a:avLst/>
+            </a:prstGeom>
+            <a:noFill/>
+            <a:ln>
+              <a:noFill/>
+            </a:ln>
+          </p:spPr>
+          <p:style>
+            <a:lnRef idx="0">
+              <a:scrgbClr r="0" g="0" b="0"/>
+            </a:lnRef>
+            <a:fillRef idx="0">
+              <a:scrgbClr r="0" g="0" b="0"/>
+            </a:fillRef>
+            <a:effectRef idx="0">
+              <a:scrgbClr r="0" g="0" b="0"/>
+            </a:effectRef>
+            <a:fontRef idx="minor">
+              <a:schemeClr val="dk1"/>
+            </a:fontRef>
+          </p:style>
+          <p:txBody>
+            <a:bodyPr rtlCol="0" anchor="ctr"/>
+            <a:lstStyle/>
+            <a:p>
+              <a:pPr algn="ctr"/>
+              <a:r>
+                <a:rPr lang="ko-KR" altLang="en-US" dirty="0"/>
+                <a:t>이름</a:t>
+              </a:r>
+            </a:p>
+          </p:txBody>
+        </p:sp>
+      </p:grpSp>
+      <p:grpSp>
+        <p:nvGrpSpPr>
+          <p:cNvPr id="24" name="그룹 23">
+            <a:extLst>
+              <a:ext uri="{FF2B5EF4-FFF2-40B4-BE49-F238E27FC236}">
+                <a16:creationId xmlns:a16="http://schemas.microsoft.com/office/drawing/2014/main" id="{E8EA0E68-7978-4431-8C12-311FF5FE13F1}"/>
+              </a:ext>
+            </a:extLst>
+          </p:cNvPr>
+          <p:cNvGrpSpPr/>
+          <p:nvPr/>
+        </p:nvGrpSpPr>
+        <p:grpSpPr>
+          <a:xfrm>
+            <a:off x="2667000" y="3322033"/>
+            <a:ext cx="6807200" cy="1075676"/>
+            <a:chOff x="4489812" y="2546911"/>
+            <a:chExt cx="2549949" cy="379602"/>
+          </a:xfrm>
+        </p:grpSpPr>
+        <p:sp>
+          <p:nvSpPr>
+            <p:cNvPr id="25" name="직사각형 24">
+              <a:extLst>
+                <a:ext uri="{FF2B5EF4-FFF2-40B4-BE49-F238E27FC236}">
+                  <a16:creationId xmlns:a16="http://schemas.microsoft.com/office/drawing/2014/main" id="{C08B89D0-D375-4B4C-A0DA-C9475BF4D131}"/>
+                </a:ext>
+              </a:extLst>
+            </p:cNvPr>
+            <p:cNvSpPr/>
+            <p:nvPr/>
+          </p:nvSpPr>
+          <p:spPr>
+            <a:xfrm>
+              <a:off x="4808556" y="2546911"/>
+              <a:ext cx="2231205" cy="379602"/>
+            </a:xfrm>
+            <a:prstGeom prst="rect">
+              <a:avLst/>
+            </a:prstGeom>
+            <a:scene3d>
+              <a:camera prst="orthographicFront"/>
+              <a:lightRig rig="threePt" dir="t"/>
+            </a:scene3d>
+            <a:sp3d>
+              <a:bevelT prst="relaxedInset"/>
+            </a:sp3d>
+          </p:spPr>
+          <p:style>
+            <a:lnRef idx="2">
+              <a:schemeClr val="dk1"/>
+            </a:lnRef>
+            <a:fillRef idx="1">
+              <a:schemeClr val="lt1"/>
+            </a:fillRef>
+            <a:effectRef idx="0">
+              <a:schemeClr val="dk1"/>
+            </a:effectRef>
+            <a:fontRef idx="minor">
+              <a:schemeClr val="dk1"/>
+            </a:fontRef>
+          </p:style>
+          <p:txBody>
+            <a:bodyPr rtlCol="0" anchor="ctr"/>
+            <a:lstStyle/>
+            <a:p>
+              <a:pPr algn="ctr"/>
+              <a:r>
+                <a:rPr lang="ko-KR" altLang="en-US" dirty="0" err="1"/>
+                <a:t>입력창</a:t>
+              </a:r>
+              <a:endParaRPr lang="ko-KR" altLang="en-US" dirty="0"/>
+            </a:p>
+          </p:txBody>
+        </p:sp>
+        <p:sp>
+          <p:nvSpPr>
+            <p:cNvPr id="26" name="직사각형 25">
+              <a:extLst>
+                <a:ext uri="{FF2B5EF4-FFF2-40B4-BE49-F238E27FC236}">
+                  <a16:creationId xmlns:a16="http://schemas.microsoft.com/office/drawing/2014/main" id="{A9E9B37D-D785-4C2B-9BE5-338DA7C554DD}"/>
+                </a:ext>
+              </a:extLst>
+            </p:cNvPr>
+            <p:cNvSpPr/>
+            <p:nvPr/>
+          </p:nvSpPr>
+          <p:spPr>
+            <a:xfrm>
+              <a:off x="4489812" y="2556349"/>
+              <a:ext cx="318744" cy="360727"/>
+            </a:xfrm>
+            <a:prstGeom prst="rect">
+              <a:avLst/>
+            </a:prstGeom>
+            <a:noFill/>
+            <a:ln>
+              <a:noFill/>
+            </a:ln>
+          </p:spPr>
+          <p:style>
+            <a:lnRef idx="0">
+              <a:scrgbClr r="0" g="0" b="0"/>
+            </a:lnRef>
+            <a:fillRef idx="0">
+              <a:scrgbClr r="0" g="0" b="0"/>
+            </a:fillRef>
+            <a:effectRef idx="0">
+              <a:scrgbClr r="0" g="0" b="0"/>
+            </a:effectRef>
+            <a:fontRef idx="minor">
+              <a:schemeClr val="dk1"/>
+            </a:fontRef>
+          </p:style>
+          <p:txBody>
+            <a:bodyPr rtlCol="0" anchor="ctr"/>
+            <a:lstStyle/>
+            <a:p>
+              <a:pPr algn="ctr"/>
+              <a:r>
+                <a:rPr lang="ko-KR" altLang="en-US" dirty="0"/>
+                <a:t>본문</a:t>
+              </a:r>
+            </a:p>
+          </p:txBody>
+        </p:sp>
+      </p:grpSp>
+      <p:grpSp>
+        <p:nvGrpSpPr>
+          <p:cNvPr id="27" name="그룹 26">
+            <a:extLst>
+              <a:ext uri="{FF2B5EF4-FFF2-40B4-BE49-F238E27FC236}">
+                <a16:creationId xmlns:a16="http://schemas.microsoft.com/office/drawing/2014/main" id="{66125DCF-B3DA-4E84-AC7D-55B051331BD6}"/>
+              </a:ext>
+            </a:extLst>
+          </p:cNvPr>
+          <p:cNvGrpSpPr/>
+          <p:nvPr/>
+        </p:nvGrpSpPr>
+        <p:grpSpPr>
+          <a:xfrm>
+            <a:off x="3512615" y="4515983"/>
+            <a:ext cx="5961585" cy="379602"/>
+            <a:chOff x="4487549" y="2546911"/>
+            <a:chExt cx="2552212" cy="379602"/>
+          </a:xfrm>
+        </p:grpSpPr>
+        <p:sp>
+          <p:nvSpPr>
+            <p:cNvPr id="28" name="직사각형 27">
+              <a:extLst>
+                <a:ext uri="{FF2B5EF4-FFF2-40B4-BE49-F238E27FC236}">
+                  <a16:creationId xmlns:a16="http://schemas.microsoft.com/office/drawing/2014/main" id="{B17DC583-6698-4175-9995-4D2A608248E2}"/>
+                </a:ext>
+              </a:extLst>
+            </p:cNvPr>
+            <p:cNvSpPr/>
+            <p:nvPr/>
+          </p:nvSpPr>
+          <p:spPr>
+            <a:xfrm>
+              <a:off x="4487549" y="2546911"/>
+              <a:ext cx="2552212" cy="379602"/>
+            </a:xfrm>
+            <a:prstGeom prst="rect">
+              <a:avLst/>
+            </a:prstGeom>
+            <a:scene3d>
+              <a:camera prst="orthographicFront"/>
+              <a:lightRig rig="threePt" dir="t"/>
+            </a:scene3d>
+            <a:sp3d>
+              <a:bevelT prst="relaxedInset"/>
+            </a:sp3d>
+          </p:spPr>
+          <p:style>
+            <a:lnRef idx="2">
+              <a:schemeClr val="dk1"/>
+            </a:lnRef>
+            <a:fillRef idx="1">
+              <a:schemeClr val="lt1"/>
+            </a:fillRef>
+            <a:effectRef idx="0">
+              <a:schemeClr val="dk1"/>
+            </a:effectRef>
+            <a:fontRef idx="minor">
+              <a:schemeClr val="dk1"/>
+            </a:fontRef>
+          </p:style>
+          <p:txBody>
+            <a:bodyPr rtlCol="0" anchor="ctr"/>
+            <a:lstStyle/>
+            <a:p>
+              <a:pPr algn="ctr"/>
+              <a:r>
+                <a:rPr lang="ko-KR" altLang="en-US" dirty="0" err="1"/>
+                <a:t>입력창</a:t>
+              </a:r>
+              <a:endParaRPr lang="ko-KR" altLang="en-US" dirty="0"/>
+            </a:p>
+          </p:txBody>
+        </p:sp>
+        <p:sp>
+          <p:nvSpPr>
+            <p:cNvPr id="29" name="직사각형 28">
+              <a:extLst>
+                <a:ext uri="{FF2B5EF4-FFF2-40B4-BE49-F238E27FC236}">
+                  <a16:creationId xmlns:a16="http://schemas.microsoft.com/office/drawing/2014/main" id="{68A62985-04A7-4299-87CD-F007B7926809}"/>
+                </a:ext>
+              </a:extLst>
+            </p:cNvPr>
+            <p:cNvSpPr/>
+            <p:nvPr/>
+          </p:nvSpPr>
+          <p:spPr>
+            <a:xfrm>
+              <a:off x="4489812" y="2556349"/>
+              <a:ext cx="654342" cy="360727"/>
+            </a:xfrm>
+            <a:prstGeom prst="rect">
+              <a:avLst/>
+            </a:prstGeom>
+            <a:noFill/>
+            <a:ln>
+              <a:noFill/>
+            </a:ln>
+          </p:spPr>
+          <p:style>
+            <a:lnRef idx="0">
+              <a:scrgbClr r="0" g="0" b="0"/>
+            </a:lnRef>
+            <a:fillRef idx="0">
+              <a:scrgbClr r="0" g="0" b="0"/>
+            </a:fillRef>
+            <a:effectRef idx="0">
+              <a:scrgbClr r="0" g="0" b="0"/>
+            </a:effectRef>
+            <a:fontRef idx="minor">
+              <a:schemeClr val="dk1"/>
+            </a:fontRef>
+          </p:style>
+          <p:txBody>
+            <a:bodyPr rtlCol="0" anchor="ctr"/>
+            <a:lstStyle/>
+            <a:p>
+              <a:pPr algn="ctr"/>
+              <a:endParaRPr lang="ko-KR" altLang="en-US" dirty="0"/>
+            </a:p>
+          </p:txBody>
+        </p:sp>
+      </p:grpSp>
+      <p:sp>
+        <p:nvSpPr>
+          <p:cNvPr id="33" name="타원 32">
+            <a:extLst>
+              <a:ext uri="{FF2B5EF4-FFF2-40B4-BE49-F238E27FC236}">
+                <a16:creationId xmlns:a16="http://schemas.microsoft.com/office/drawing/2014/main" id="{B0B85087-B482-471B-9240-86A45BD6BDFD}"/>
+              </a:ext>
+            </a:extLst>
+          </p:cNvPr>
+          <p:cNvSpPr/>
+          <p:nvPr/>
+        </p:nvSpPr>
+        <p:spPr>
+          <a:xfrm>
+            <a:off x="5849261" y="5581097"/>
+            <a:ext cx="142613" cy="142613"/>
+          </a:xfrm>
+          <a:prstGeom prst="ellipse">
+            <a:avLst/>
+          </a:prstGeom>
+        </p:spPr>
+        <p:style>
+          <a:lnRef idx="2">
+            <a:schemeClr val="dk1">
+              <a:shade val="50000"/>
+            </a:schemeClr>
+          </a:lnRef>
+          <a:fillRef idx="1">
+            <a:schemeClr val="dk1"/>
+          </a:fillRef>
+          <a:effectRef idx="0">
+            <a:schemeClr val="dk1"/>
+          </a:effectRef>
+          <a:fontRef idx="minor">
+            <a:schemeClr val="lt1"/>
+          </a:fontRef>
+        </p:style>
+        <p:txBody>
+          <a:bodyPr rtlCol="0" anchor="ctr"/>
+          <a:lstStyle/>
+          <a:p>
+            <a:pPr algn="ctr"/>
+            <a:endParaRPr lang="ko-KR" altLang="en-US"/>
+          </a:p>
+        </p:txBody>
+      </p:sp>
+      <p:sp>
+        <p:nvSpPr>
+          <p:cNvPr id="34" name="타원 33">
+            <a:extLst>
+              <a:ext uri="{FF2B5EF4-FFF2-40B4-BE49-F238E27FC236}">
+                <a16:creationId xmlns:a16="http://schemas.microsoft.com/office/drawing/2014/main" id="{C8ADB534-FE46-4629-A353-40E2C8C6222D}"/>
+              </a:ext>
+            </a:extLst>
+          </p:cNvPr>
+          <p:cNvSpPr/>
+          <p:nvPr/>
+        </p:nvSpPr>
+        <p:spPr>
+          <a:xfrm>
+            <a:off x="5849262" y="5781886"/>
+            <a:ext cx="142612" cy="142612"/>
+          </a:xfrm>
+          <a:prstGeom prst="ellipse">
+            <a:avLst/>
+          </a:prstGeom>
+        </p:spPr>
+        <p:style>
+          <a:lnRef idx="2">
+            <a:schemeClr val="dk1">
+              <a:shade val="50000"/>
+            </a:schemeClr>
+          </a:lnRef>
+          <a:fillRef idx="1">
+            <a:schemeClr val="dk1"/>
+          </a:fillRef>
+          <a:effectRef idx="0">
+            <a:schemeClr val="dk1"/>
+          </a:effectRef>
+          <a:fontRef idx="minor">
+            <a:schemeClr val="lt1"/>
+          </a:fontRef>
+        </p:style>
+        <p:txBody>
+          <a:bodyPr rtlCol="0" anchor="ctr"/>
+          <a:lstStyle/>
+          <a:p>
+            <a:pPr algn="ctr"/>
+            <a:endParaRPr lang="ko-KR" altLang="en-US"/>
+          </a:p>
+        </p:txBody>
+      </p:sp>
+      <p:sp>
+        <p:nvSpPr>
+          <p:cNvPr id="36" name="사각형: 둥근 모서리 35">
+            <a:extLst>
+              <a:ext uri="{FF2B5EF4-FFF2-40B4-BE49-F238E27FC236}">
+                <a16:creationId xmlns:a16="http://schemas.microsoft.com/office/drawing/2014/main" id="{A6164C3E-2DBC-429E-96C0-E73EACCA0555}"/>
+              </a:ext>
+            </a:extLst>
+          </p:cNvPr>
+          <p:cNvSpPr/>
+          <p:nvPr/>
+        </p:nvSpPr>
+        <p:spPr>
+          <a:xfrm>
+            <a:off x="2578649" y="5159063"/>
+            <a:ext cx="1059061" cy="332151"/>
+          </a:xfrm>
+          <a:prstGeom prst="roundRect">
+            <a:avLst/>
+          </a:prstGeom>
+          <a:scene3d>
+            <a:camera prst="orthographicFront"/>
+            <a:lightRig rig="threePt" dir="t"/>
+          </a:scene3d>
+          <a:sp3d>
+            <a:bevelT/>
+          </a:sp3d>
+        </p:spPr>
+        <p:style>
+          <a:lnRef idx="2">
+            <a:schemeClr val="dk1"/>
+          </a:lnRef>
+          <a:fillRef idx="1">
+            <a:schemeClr val="lt1"/>
+          </a:fillRef>
+          <a:effectRef idx="0">
+            <a:schemeClr val="dk1"/>
+          </a:effectRef>
+          <a:fontRef idx="minor">
+            <a:schemeClr val="dk1"/>
+          </a:fontRef>
+        </p:style>
+        <p:txBody>
+          <a:bodyPr rtlCol="0" anchor="ctr"/>
+          <a:lstStyle/>
+          <a:p>
+            <a:pPr algn="ctr"/>
+            <a:r>
+              <a:rPr lang="ko-KR" altLang="en-US" dirty="0"/>
+              <a:t>첨부</a:t>
+            </a:r>
+          </a:p>
+        </p:txBody>
+      </p:sp>
+      <p:sp>
+        <p:nvSpPr>
+          <p:cNvPr id="37" name="직사각형 36">
+            <a:extLst>
+              <a:ext uri="{FF2B5EF4-FFF2-40B4-BE49-F238E27FC236}">
+                <a16:creationId xmlns:a16="http://schemas.microsoft.com/office/drawing/2014/main" id="{20BA5F56-892B-4134-80D3-D4EAF659F2B0}"/>
+              </a:ext>
+            </a:extLst>
+          </p:cNvPr>
+          <p:cNvSpPr/>
+          <p:nvPr/>
+        </p:nvSpPr>
+        <p:spPr>
+          <a:xfrm>
+            <a:off x="2781009" y="4530140"/>
+            <a:ext cx="654342" cy="360727"/>
+          </a:xfrm>
+          <a:prstGeom prst="rect">
+            <a:avLst/>
+          </a:prstGeom>
+          <a:noFill/>
+          <a:ln>
+            <a:noFill/>
+          </a:ln>
+        </p:spPr>
+        <p:style>
+          <a:lnRef idx="0">
+            <a:scrgbClr r="0" g="0" b="0"/>
+          </a:lnRef>
+          <a:fillRef idx="0">
+            <a:scrgbClr r="0" g="0" b="0"/>
+          </a:fillRef>
+          <a:effectRef idx="0">
+            <a:scrgbClr r="0" g="0" b="0"/>
+          </a:effectRef>
+          <a:fontRef idx="minor">
+            <a:schemeClr val="dk1"/>
+          </a:fontRef>
+        </p:style>
+        <p:txBody>
+          <a:bodyPr rtlCol="0" anchor="ctr"/>
+          <a:lstStyle/>
+          <a:p>
+            <a:pPr algn="ctr"/>
+            <a:r>
+              <a:rPr lang="ko-KR" altLang="en-US" dirty="0"/>
+              <a:t>태그</a:t>
+            </a:r>
+          </a:p>
+        </p:txBody>
+      </p:sp>
+      <p:sp>
+        <p:nvSpPr>
+          <p:cNvPr id="41" name="직사각형 40">
+            <a:extLst>
+              <a:ext uri="{FF2B5EF4-FFF2-40B4-BE49-F238E27FC236}">
+                <a16:creationId xmlns:a16="http://schemas.microsoft.com/office/drawing/2014/main" id="{99974741-F7A3-4A94-92CF-4BF3DF354123}"/>
+              </a:ext>
+            </a:extLst>
+          </p:cNvPr>
+          <p:cNvSpPr/>
+          <p:nvPr/>
+        </p:nvSpPr>
+        <p:spPr>
+          <a:xfrm>
+            <a:off x="3711610" y="5122047"/>
+            <a:ext cx="5762590" cy="400874"/>
+          </a:xfrm>
+          <a:prstGeom prst="rect">
+            <a:avLst/>
+          </a:prstGeom>
+        </p:spPr>
+        <p:style>
+          <a:lnRef idx="2">
+            <a:schemeClr val="dk1"/>
+          </a:lnRef>
+          <a:fillRef idx="1">
+            <a:schemeClr val="lt1"/>
+          </a:fillRef>
+          <a:effectRef idx="0">
+            <a:schemeClr val="dk1"/>
+          </a:effectRef>
+          <a:fontRef idx="minor">
+            <a:schemeClr val="dk1"/>
+          </a:fontRef>
+        </p:style>
+        <p:txBody>
+          <a:bodyPr rtlCol="0" anchor="ctr"/>
+          <a:lstStyle/>
+          <a:p>
+            <a:pPr algn="ctr"/>
+            <a:r>
+              <a:rPr lang="ko-KR" altLang="en-US" dirty="0"/>
+              <a:t>첨부파일 정보</a:t>
+            </a:r>
+          </a:p>
+        </p:txBody>
+      </p:sp>
     </p:spTree>
     <p:extLst>
       <p:ext uri="{BB962C8B-B14F-4D97-AF65-F5344CB8AC3E}">
@@ -19893,6 +21850,1356 @@
     <p:extLst>
       <p:ext uri="{BB962C8B-B14F-4D97-AF65-F5344CB8AC3E}">
         <p14:creationId xmlns:p14="http://schemas.microsoft.com/office/powerpoint/2010/main" val="978844331"/>
+      </p:ext>
+    </p:extLst>
+  </p:cSld>
+  <p:clrMapOvr>
+    <a:masterClrMapping/>
+  </p:clrMapOvr>
+</p:sld>
+</file>
+
+<file path=ppt/slides/slide20.xml><?xml version="1.0" encoding="utf-8"?>
+<p:sld xmlns:a="http://schemas.openxmlformats.org/drawingml/2006/main" xmlns:r="http://schemas.openxmlformats.org/officeDocument/2006/relationships" xmlns:p="http://schemas.openxmlformats.org/presentationml/2006/main">
+  <p:cSld>
+    <p:spTree>
+      <p:nvGrpSpPr>
+        <p:cNvPr id="1" name=""/>
+        <p:cNvGrpSpPr/>
+        <p:nvPr/>
+      </p:nvGrpSpPr>
+      <p:grpSpPr>
+        <a:xfrm>
+          <a:off x="0" y="0"/>
+          <a:ext cx="0" cy="0"/>
+          <a:chOff x="0" y="0"/>
+          <a:chExt cx="0" cy="0"/>
+        </a:xfrm>
+      </p:grpSpPr>
+      <p:sp>
+        <p:nvSpPr>
+          <p:cNvPr id="3" name="사각형: 둥근 모서리 2">
+            <a:extLst>
+              <a:ext uri="{FF2B5EF4-FFF2-40B4-BE49-F238E27FC236}">
+                <a16:creationId xmlns:a16="http://schemas.microsoft.com/office/drawing/2014/main" id="{F9D81498-7312-4545-8891-2C080EDD3FED}"/>
+              </a:ext>
+            </a:extLst>
+          </p:cNvPr>
+          <p:cNvSpPr/>
+          <p:nvPr/>
+        </p:nvSpPr>
+        <p:spPr>
+          <a:xfrm>
+            <a:off x="73866" y="78910"/>
+            <a:ext cx="2870670" cy="332151"/>
+          </a:xfrm>
+          <a:prstGeom prst="roundRect">
+            <a:avLst/>
+          </a:prstGeom>
+        </p:spPr>
+        <p:style>
+          <a:lnRef idx="2">
+            <a:schemeClr val="dk1"/>
+          </a:lnRef>
+          <a:fillRef idx="1">
+            <a:schemeClr val="lt1"/>
+          </a:fillRef>
+          <a:effectRef idx="0">
+            <a:schemeClr val="dk1"/>
+          </a:effectRef>
+          <a:fontRef idx="minor">
+            <a:schemeClr val="dk1"/>
+          </a:fontRef>
+        </p:style>
+        <p:txBody>
+          <a:bodyPr rtlCol="0" anchor="ctr"/>
+          <a:lstStyle/>
+          <a:p>
+            <a:pPr algn="ctr"/>
+            <a:r>
+              <a:rPr lang="ko-KR" altLang="en-US" dirty="0"/>
+              <a:t>관리자 페이지</a:t>
+            </a:r>
+            <a:r>
+              <a:rPr lang="en-US" altLang="ko-KR" dirty="0"/>
+              <a:t>-</a:t>
+            </a:r>
+            <a:r>
+              <a:rPr lang="ko-KR" altLang="en-US" dirty="0"/>
+              <a:t>회원관리</a:t>
+            </a:r>
+          </a:p>
+        </p:txBody>
+      </p:sp>
+      <p:grpSp>
+        <p:nvGrpSpPr>
+          <p:cNvPr id="7" name="그룹 6">
+            <a:extLst>
+              <a:ext uri="{FF2B5EF4-FFF2-40B4-BE49-F238E27FC236}">
+                <a16:creationId xmlns:a16="http://schemas.microsoft.com/office/drawing/2014/main" id="{9C67A2EE-B9DB-4CB9-9D5B-C1521A05D19F}"/>
+              </a:ext>
+            </a:extLst>
+          </p:cNvPr>
+          <p:cNvGrpSpPr/>
+          <p:nvPr/>
+        </p:nvGrpSpPr>
+        <p:grpSpPr>
+          <a:xfrm>
+            <a:off x="2329649" y="835192"/>
+            <a:ext cx="7532702" cy="5187616"/>
+            <a:chOff x="2329649" y="835192"/>
+            <a:chExt cx="7532702" cy="5187616"/>
+          </a:xfrm>
+        </p:grpSpPr>
+        <p:pic>
+          <p:nvPicPr>
+            <p:cNvPr id="5" name="그림 4">
+              <a:extLst>
+                <a:ext uri="{FF2B5EF4-FFF2-40B4-BE49-F238E27FC236}">
+                  <a16:creationId xmlns:a16="http://schemas.microsoft.com/office/drawing/2014/main" id="{A903B686-C3E3-45C0-BFBD-CB994972AD1F}"/>
+                </a:ext>
+              </a:extLst>
+            </p:cNvPr>
+            <p:cNvPicPr>
+              <a:picLocks noChangeAspect="1"/>
+            </p:cNvPicPr>
+            <p:nvPr/>
+          </p:nvPicPr>
+          <p:blipFill>
+            <a:blip r:embed="rId2"/>
+            <a:stretch>
+              <a:fillRect/>
+            </a:stretch>
+          </p:blipFill>
+          <p:spPr>
+            <a:xfrm>
+              <a:off x="2329649" y="835192"/>
+              <a:ext cx="7532702" cy="5187616"/>
+            </a:xfrm>
+            <a:prstGeom prst="rect">
+              <a:avLst/>
+            </a:prstGeom>
+          </p:spPr>
+        </p:pic>
+        <p:sp>
+          <p:nvSpPr>
+            <p:cNvPr id="6" name="직사각형 5">
+              <a:extLst>
+                <a:ext uri="{FF2B5EF4-FFF2-40B4-BE49-F238E27FC236}">
+                  <a16:creationId xmlns:a16="http://schemas.microsoft.com/office/drawing/2014/main" id="{E7EA77AD-978C-40B6-824E-78AA15720973}"/>
+                </a:ext>
+              </a:extLst>
+            </p:cNvPr>
+            <p:cNvSpPr/>
+            <p:nvPr/>
+          </p:nvSpPr>
+          <p:spPr>
+            <a:xfrm>
+              <a:off x="2332139" y="1795244"/>
+              <a:ext cx="7524925" cy="4211273"/>
+            </a:xfrm>
+            <a:prstGeom prst="rect">
+              <a:avLst/>
+            </a:prstGeom>
+          </p:spPr>
+          <p:style>
+            <a:lnRef idx="2">
+              <a:schemeClr val="dk1"/>
+            </a:lnRef>
+            <a:fillRef idx="1">
+              <a:schemeClr val="lt1"/>
+            </a:fillRef>
+            <a:effectRef idx="0">
+              <a:schemeClr val="dk1"/>
+            </a:effectRef>
+            <a:fontRef idx="minor">
+              <a:schemeClr val="dk1"/>
+            </a:fontRef>
+          </p:style>
+          <p:txBody>
+            <a:bodyPr rtlCol="0" anchor="ctr"/>
+            <a:lstStyle/>
+            <a:p>
+              <a:pPr algn="ctr"/>
+              <a:endParaRPr lang="ko-KR" altLang="en-US" dirty="0"/>
+            </a:p>
+          </p:txBody>
+        </p:sp>
+      </p:grpSp>
+      <p:sp>
+        <p:nvSpPr>
+          <p:cNvPr id="16" name="직사각형 15">
+            <a:extLst>
+              <a:ext uri="{FF2B5EF4-FFF2-40B4-BE49-F238E27FC236}">
+                <a16:creationId xmlns:a16="http://schemas.microsoft.com/office/drawing/2014/main" id="{34D15001-F4B4-4A25-85F1-5125EE2E8969}"/>
+              </a:ext>
+            </a:extLst>
+          </p:cNvPr>
+          <p:cNvSpPr/>
+          <p:nvPr/>
+        </p:nvSpPr>
+        <p:spPr>
+          <a:xfrm>
+            <a:off x="260057" y="1310081"/>
+            <a:ext cx="1890320" cy="379602"/>
+          </a:xfrm>
+          <a:prstGeom prst="rect">
+            <a:avLst/>
+          </a:prstGeom>
+          <a:scene3d>
+            <a:camera prst="orthographicFront"/>
+            <a:lightRig rig="threePt" dir="t"/>
+          </a:scene3d>
+          <a:sp3d>
+            <a:bevelT prst="relaxedInset"/>
+          </a:sp3d>
+        </p:spPr>
+        <p:style>
+          <a:lnRef idx="2">
+            <a:schemeClr val="dk1"/>
+          </a:lnRef>
+          <a:fillRef idx="1">
+            <a:schemeClr val="lt1"/>
+          </a:fillRef>
+          <a:effectRef idx="0">
+            <a:schemeClr val="dk1"/>
+          </a:effectRef>
+          <a:fontRef idx="minor">
+            <a:schemeClr val="dk1"/>
+          </a:fontRef>
+        </p:style>
+        <p:txBody>
+          <a:bodyPr rtlCol="0" anchor="ctr"/>
+          <a:lstStyle/>
+          <a:p>
+            <a:pPr algn="ctr"/>
+            <a:r>
+              <a:rPr lang="ko-KR" altLang="en-US" dirty="0" err="1"/>
+              <a:t>입력창</a:t>
+            </a:r>
+            <a:endParaRPr lang="ko-KR" altLang="en-US" dirty="0"/>
+          </a:p>
+        </p:txBody>
+      </p:sp>
+      <p:sp>
+        <p:nvSpPr>
+          <p:cNvPr id="17" name="사각형: 둥근 모서리 16">
+            <a:extLst>
+              <a:ext uri="{FF2B5EF4-FFF2-40B4-BE49-F238E27FC236}">
+                <a16:creationId xmlns:a16="http://schemas.microsoft.com/office/drawing/2014/main" id="{38EE6A1E-3B15-4966-BC87-D2EBB39CB8B2}"/>
+              </a:ext>
+            </a:extLst>
+          </p:cNvPr>
+          <p:cNvSpPr/>
+          <p:nvPr/>
+        </p:nvSpPr>
+        <p:spPr>
+          <a:xfrm>
+            <a:off x="260057" y="1795244"/>
+            <a:ext cx="1350630" cy="332151"/>
+          </a:xfrm>
+          <a:prstGeom prst="roundRect">
+            <a:avLst/>
+          </a:prstGeom>
+          <a:scene3d>
+            <a:camera prst="orthographicFront"/>
+            <a:lightRig rig="threePt" dir="t"/>
+          </a:scene3d>
+          <a:sp3d>
+            <a:bevelT/>
+          </a:sp3d>
+        </p:spPr>
+        <p:style>
+          <a:lnRef idx="2">
+            <a:schemeClr val="dk1"/>
+          </a:lnRef>
+          <a:fillRef idx="1">
+            <a:schemeClr val="lt1"/>
+          </a:fillRef>
+          <a:effectRef idx="0">
+            <a:schemeClr val="dk1"/>
+          </a:effectRef>
+          <a:fontRef idx="minor">
+            <a:schemeClr val="dk1"/>
+          </a:fontRef>
+        </p:style>
+        <p:txBody>
+          <a:bodyPr rtlCol="0" anchor="ctr"/>
+          <a:lstStyle/>
+          <a:p>
+            <a:pPr algn="ctr"/>
+            <a:r>
+              <a:rPr lang="ko-KR" altLang="en-US" dirty="0"/>
+              <a:t>버튼</a:t>
+            </a:r>
+          </a:p>
+        </p:txBody>
+      </p:sp>
+      <p:sp>
+        <p:nvSpPr>
+          <p:cNvPr id="12" name="사각형: 둥근 모서리 11">
+            <a:extLst>
+              <a:ext uri="{FF2B5EF4-FFF2-40B4-BE49-F238E27FC236}">
+                <a16:creationId xmlns:a16="http://schemas.microsoft.com/office/drawing/2014/main" id="{53223CA0-9F22-43FA-BFF0-5B29D4CFEC17}"/>
+              </a:ext>
+            </a:extLst>
+          </p:cNvPr>
+          <p:cNvSpPr/>
+          <p:nvPr/>
+        </p:nvSpPr>
+        <p:spPr>
+          <a:xfrm>
+            <a:off x="4092152" y="1960133"/>
+            <a:ext cx="1350630" cy="332151"/>
+          </a:xfrm>
+          <a:prstGeom prst="roundRect">
+            <a:avLst/>
+          </a:prstGeom>
+          <a:noFill/>
+          <a:scene3d>
+            <a:camera prst="orthographicFront"/>
+            <a:lightRig rig="threePt" dir="t"/>
+          </a:scene3d>
+          <a:sp3d>
+            <a:bevelT/>
+          </a:sp3d>
+        </p:spPr>
+        <p:style>
+          <a:lnRef idx="2">
+            <a:schemeClr val="dk1"/>
+          </a:lnRef>
+          <a:fillRef idx="1">
+            <a:schemeClr val="lt1"/>
+          </a:fillRef>
+          <a:effectRef idx="0">
+            <a:schemeClr val="dk1"/>
+          </a:effectRef>
+          <a:fontRef idx="minor">
+            <a:schemeClr val="dk1"/>
+          </a:fontRef>
+        </p:style>
+        <p:txBody>
+          <a:bodyPr rtlCol="0" anchor="ctr"/>
+          <a:lstStyle/>
+          <a:p>
+            <a:pPr algn="ctr"/>
+            <a:r>
+              <a:rPr lang="ko-KR" altLang="en-US" dirty="0"/>
+              <a:t>회원 관리</a:t>
+            </a:r>
+          </a:p>
+        </p:txBody>
+      </p:sp>
+      <p:sp>
+        <p:nvSpPr>
+          <p:cNvPr id="13" name="사각형: 둥근 모서리 12">
+            <a:extLst>
+              <a:ext uri="{FF2B5EF4-FFF2-40B4-BE49-F238E27FC236}">
+                <a16:creationId xmlns:a16="http://schemas.microsoft.com/office/drawing/2014/main" id="{AC0B99E6-C7CE-4EAE-8D86-EA644D113C96}"/>
+              </a:ext>
+            </a:extLst>
+          </p:cNvPr>
+          <p:cNvSpPr/>
+          <p:nvPr/>
+        </p:nvSpPr>
+        <p:spPr>
+          <a:xfrm>
+            <a:off x="2538519" y="1960133"/>
+            <a:ext cx="1483149" cy="332151"/>
+          </a:xfrm>
+          <a:prstGeom prst="roundRect">
+            <a:avLst/>
+          </a:prstGeom>
+          <a:noFill/>
+          <a:scene3d>
+            <a:camera prst="orthographicFront"/>
+            <a:lightRig rig="threePt" dir="t"/>
+          </a:scene3d>
+          <a:sp3d>
+            <a:bevelT/>
+          </a:sp3d>
+        </p:spPr>
+        <p:style>
+          <a:lnRef idx="2">
+            <a:schemeClr val="dk1"/>
+          </a:lnRef>
+          <a:fillRef idx="1">
+            <a:schemeClr val="lt1"/>
+          </a:fillRef>
+          <a:effectRef idx="0">
+            <a:schemeClr val="dk1"/>
+          </a:effectRef>
+          <a:fontRef idx="minor">
+            <a:schemeClr val="dk1"/>
+          </a:fontRef>
+        </p:style>
+        <p:txBody>
+          <a:bodyPr rtlCol="0" anchor="ctr"/>
+          <a:lstStyle/>
+          <a:p>
+            <a:pPr algn="ctr"/>
+            <a:r>
+              <a:rPr lang="ko-KR" altLang="en-US" dirty="0"/>
+              <a:t>방문자 관리</a:t>
+            </a:r>
+          </a:p>
+        </p:txBody>
+      </p:sp>
+      <p:sp>
+        <p:nvSpPr>
+          <p:cNvPr id="14" name="사각형: 둥근 모서리 13">
+            <a:extLst>
+              <a:ext uri="{FF2B5EF4-FFF2-40B4-BE49-F238E27FC236}">
+                <a16:creationId xmlns:a16="http://schemas.microsoft.com/office/drawing/2014/main" id="{F9BA5A55-42CD-4233-BF84-B585B606AD45}"/>
+              </a:ext>
+            </a:extLst>
+          </p:cNvPr>
+          <p:cNvSpPr/>
+          <p:nvPr/>
+        </p:nvSpPr>
+        <p:spPr>
+          <a:xfrm>
+            <a:off x="7474070" y="1960131"/>
+            <a:ext cx="1890320" cy="332151"/>
+          </a:xfrm>
+          <a:prstGeom prst="roundRect">
+            <a:avLst/>
+          </a:prstGeom>
+          <a:solidFill>
+            <a:srgbClr val="FFC000"/>
+          </a:solidFill>
+          <a:scene3d>
+            <a:camera prst="orthographicFront"/>
+            <a:lightRig rig="threePt" dir="t"/>
+          </a:scene3d>
+          <a:sp3d>
+            <a:bevelT/>
+          </a:sp3d>
+        </p:spPr>
+        <p:style>
+          <a:lnRef idx="2">
+            <a:schemeClr val="dk1"/>
+          </a:lnRef>
+          <a:fillRef idx="1">
+            <a:schemeClr val="lt1"/>
+          </a:fillRef>
+          <a:effectRef idx="0">
+            <a:schemeClr val="dk1"/>
+          </a:effectRef>
+          <a:fontRef idx="minor">
+            <a:schemeClr val="dk1"/>
+          </a:fontRef>
+        </p:style>
+        <p:txBody>
+          <a:bodyPr rtlCol="0" anchor="ctr"/>
+          <a:lstStyle/>
+          <a:p>
+            <a:pPr algn="ctr"/>
+            <a:r>
+              <a:rPr lang="ko-KR" altLang="en-US" dirty="0"/>
+              <a:t>카페 관리</a:t>
+            </a:r>
+          </a:p>
+        </p:txBody>
+      </p:sp>
+      <p:pic>
+        <p:nvPicPr>
+          <p:cNvPr id="23" name="Picture 2" descr="스크롤바 이미지 - 게티이미지뱅크">
+            <a:extLst>
+              <a:ext uri="{FF2B5EF4-FFF2-40B4-BE49-F238E27FC236}">
+                <a16:creationId xmlns:a16="http://schemas.microsoft.com/office/drawing/2014/main" id="{A893E749-20E4-4CDC-83EC-9F55ED7942D3}"/>
+              </a:ext>
+            </a:extLst>
+          </p:cNvPr>
+          <p:cNvPicPr>
+            <a:picLocks noChangeAspect="1" noChangeArrowheads="1"/>
+          </p:cNvPicPr>
+          <p:nvPr/>
+        </p:nvPicPr>
+        <p:blipFill rotWithShape="1">
+          <a:blip r:embed="rId3">
+            <a:extLst>
+              <a:ext uri="{28A0092B-C50C-407E-A947-70E740481C1C}">
+                <a14:useLocalDpi xmlns:a14="http://schemas.microsoft.com/office/drawing/2010/main" val="0"/>
+              </a:ext>
+            </a:extLst>
+          </a:blip>
+          <a:srcRect l="59303" t="1819" r="32418" b="3298"/>
+          <a:stretch/>
+        </p:blipFill>
+        <p:spPr bwMode="auto">
+          <a:xfrm>
+            <a:off x="9639300" y="2914376"/>
+            <a:ext cx="217764" cy="2830087"/>
+          </a:xfrm>
+          <a:prstGeom prst="rect">
+            <a:avLst/>
+          </a:prstGeom>
+          <a:noFill/>
+          <a:extLst>
+            <a:ext uri="{909E8E84-426E-40DD-AFC4-6F175D3DCCD1}">
+              <a14:hiddenFill xmlns:a14="http://schemas.microsoft.com/office/drawing/2010/main">
+                <a:solidFill>
+                  <a:srgbClr val="FFFFFF"/>
+                </a:solidFill>
+              </a14:hiddenFill>
+            </a:ext>
+          </a:extLst>
+        </p:spPr>
+      </p:pic>
+      <p:sp>
+        <p:nvSpPr>
+          <p:cNvPr id="19" name="사각형: 둥근 모서리 18">
+            <a:extLst>
+              <a:ext uri="{FF2B5EF4-FFF2-40B4-BE49-F238E27FC236}">
+                <a16:creationId xmlns:a16="http://schemas.microsoft.com/office/drawing/2014/main" id="{CE56F1B8-6CE8-49F2-A0AC-213158F85A59}"/>
+              </a:ext>
+            </a:extLst>
+          </p:cNvPr>
+          <p:cNvSpPr/>
+          <p:nvPr/>
+        </p:nvSpPr>
+        <p:spPr>
+          <a:xfrm>
+            <a:off x="5513266" y="1960132"/>
+            <a:ext cx="1890320" cy="332151"/>
+          </a:xfrm>
+          <a:prstGeom prst="roundRect">
+            <a:avLst/>
+          </a:prstGeom>
+          <a:noFill/>
+          <a:scene3d>
+            <a:camera prst="orthographicFront"/>
+            <a:lightRig rig="threePt" dir="t"/>
+          </a:scene3d>
+          <a:sp3d>
+            <a:bevelT/>
+          </a:sp3d>
+        </p:spPr>
+        <p:style>
+          <a:lnRef idx="2">
+            <a:schemeClr val="dk1"/>
+          </a:lnRef>
+          <a:fillRef idx="1">
+            <a:schemeClr val="lt1"/>
+          </a:fillRef>
+          <a:effectRef idx="0">
+            <a:schemeClr val="dk1"/>
+          </a:effectRef>
+          <a:fontRef idx="minor">
+            <a:schemeClr val="dk1"/>
+          </a:fontRef>
+        </p:style>
+        <p:txBody>
+          <a:bodyPr rtlCol="0" anchor="ctr"/>
+          <a:lstStyle/>
+          <a:p>
+            <a:pPr algn="ctr"/>
+            <a:r>
+              <a:rPr lang="ko-KR" altLang="en-US" dirty="0"/>
+              <a:t>디저트 관리</a:t>
+            </a:r>
+          </a:p>
+        </p:txBody>
+      </p:sp>
+      <p:pic>
+        <p:nvPicPr>
+          <p:cNvPr id="18" name="Picture 2" descr="스크롤바 이미지 - 게티이미지뱅크">
+            <a:extLst>
+              <a:ext uri="{FF2B5EF4-FFF2-40B4-BE49-F238E27FC236}">
+                <a16:creationId xmlns:a16="http://schemas.microsoft.com/office/drawing/2014/main" id="{8E997B88-121E-47CF-B92F-7C917254796F}"/>
+              </a:ext>
+            </a:extLst>
+          </p:cNvPr>
+          <p:cNvPicPr>
+            <a:picLocks noChangeAspect="1" noChangeArrowheads="1"/>
+          </p:cNvPicPr>
+          <p:nvPr/>
+        </p:nvPicPr>
+        <p:blipFill rotWithShape="1">
+          <a:blip r:embed="rId3">
+            <a:extLst>
+              <a:ext uri="{28A0092B-C50C-407E-A947-70E740481C1C}">
+                <a14:useLocalDpi xmlns:a14="http://schemas.microsoft.com/office/drawing/2010/main" val="0"/>
+              </a:ext>
+            </a:extLst>
+          </a:blip>
+          <a:srcRect l="59303" t="1819" r="32418" b="3298"/>
+          <a:stretch/>
+        </p:blipFill>
+        <p:spPr bwMode="auto">
+          <a:xfrm>
+            <a:off x="9639300" y="2914376"/>
+            <a:ext cx="217764" cy="2830087"/>
+          </a:xfrm>
+          <a:prstGeom prst="rect">
+            <a:avLst/>
+          </a:prstGeom>
+          <a:noFill/>
+          <a:extLst>
+            <a:ext uri="{909E8E84-426E-40DD-AFC4-6F175D3DCCD1}">
+              <a14:hiddenFill xmlns:a14="http://schemas.microsoft.com/office/drawing/2010/main">
+                <a:solidFill>
+                  <a:srgbClr val="FFFFFF"/>
+                </a:solidFill>
+              </a14:hiddenFill>
+            </a:ext>
+          </a:extLst>
+        </p:spPr>
+      </p:pic>
+      <p:grpSp>
+        <p:nvGrpSpPr>
+          <p:cNvPr id="20" name="그룹 19">
+            <a:extLst>
+              <a:ext uri="{FF2B5EF4-FFF2-40B4-BE49-F238E27FC236}">
+                <a16:creationId xmlns:a16="http://schemas.microsoft.com/office/drawing/2014/main" id="{7201079E-0422-4C50-A047-A7165D716672}"/>
+              </a:ext>
+            </a:extLst>
+          </p:cNvPr>
+          <p:cNvGrpSpPr/>
+          <p:nvPr/>
+        </p:nvGrpSpPr>
+        <p:grpSpPr>
+          <a:xfrm>
+            <a:off x="2324100" y="2807326"/>
+            <a:ext cx="7150099" cy="379602"/>
+            <a:chOff x="3978734" y="2546911"/>
+            <a:chExt cx="3061027" cy="379602"/>
+          </a:xfrm>
+        </p:grpSpPr>
+        <p:sp>
+          <p:nvSpPr>
+            <p:cNvPr id="21" name="직사각형 20">
+              <a:extLst>
+                <a:ext uri="{FF2B5EF4-FFF2-40B4-BE49-F238E27FC236}">
+                  <a16:creationId xmlns:a16="http://schemas.microsoft.com/office/drawing/2014/main" id="{1B12DE47-8D9C-4D86-B41B-A8D64C0F2B7D}"/>
+                </a:ext>
+              </a:extLst>
+            </p:cNvPr>
+            <p:cNvSpPr/>
+            <p:nvPr/>
+          </p:nvSpPr>
+          <p:spPr>
+            <a:xfrm>
+              <a:off x="4487549" y="2546911"/>
+              <a:ext cx="2552212" cy="379602"/>
+            </a:xfrm>
+            <a:prstGeom prst="rect">
+              <a:avLst/>
+            </a:prstGeom>
+            <a:scene3d>
+              <a:camera prst="orthographicFront"/>
+              <a:lightRig rig="threePt" dir="t"/>
+            </a:scene3d>
+            <a:sp3d>
+              <a:bevelT prst="relaxedInset"/>
+            </a:sp3d>
+          </p:spPr>
+          <p:style>
+            <a:lnRef idx="2">
+              <a:schemeClr val="dk1"/>
+            </a:lnRef>
+            <a:fillRef idx="1">
+              <a:schemeClr val="lt1"/>
+            </a:fillRef>
+            <a:effectRef idx="0">
+              <a:schemeClr val="dk1"/>
+            </a:effectRef>
+            <a:fontRef idx="minor">
+              <a:schemeClr val="dk1"/>
+            </a:fontRef>
+          </p:style>
+          <p:txBody>
+            <a:bodyPr rtlCol="0" anchor="ctr"/>
+            <a:lstStyle/>
+            <a:p>
+              <a:pPr algn="ctr"/>
+              <a:r>
+                <a:rPr lang="ko-KR" altLang="en-US" dirty="0" err="1"/>
+                <a:t>입력창</a:t>
+              </a:r>
+              <a:endParaRPr lang="ko-KR" altLang="en-US" dirty="0"/>
+            </a:p>
+          </p:txBody>
+        </p:sp>
+        <p:sp>
+          <p:nvSpPr>
+            <p:cNvPr id="22" name="직사각형 21">
+              <a:extLst>
+                <a:ext uri="{FF2B5EF4-FFF2-40B4-BE49-F238E27FC236}">
+                  <a16:creationId xmlns:a16="http://schemas.microsoft.com/office/drawing/2014/main" id="{FCDD63F6-7E3C-4F65-86B6-118E169E7BC3}"/>
+                </a:ext>
+              </a:extLst>
+            </p:cNvPr>
+            <p:cNvSpPr/>
+            <p:nvPr/>
+          </p:nvSpPr>
+          <p:spPr>
+            <a:xfrm>
+              <a:off x="3978734" y="2556349"/>
+              <a:ext cx="657875" cy="360727"/>
+            </a:xfrm>
+            <a:prstGeom prst="rect">
+              <a:avLst/>
+            </a:prstGeom>
+            <a:noFill/>
+            <a:ln>
+              <a:noFill/>
+            </a:ln>
+          </p:spPr>
+          <p:style>
+            <a:lnRef idx="0">
+              <a:scrgbClr r="0" g="0" b="0"/>
+            </a:lnRef>
+            <a:fillRef idx="0">
+              <a:scrgbClr r="0" g="0" b="0"/>
+            </a:fillRef>
+            <a:effectRef idx="0">
+              <a:scrgbClr r="0" g="0" b="0"/>
+            </a:effectRef>
+            <a:fontRef idx="minor">
+              <a:schemeClr val="dk1"/>
+            </a:fontRef>
+          </p:style>
+          <p:txBody>
+            <a:bodyPr rtlCol="0" anchor="ctr"/>
+            <a:lstStyle/>
+            <a:p>
+              <a:pPr algn="ctr"/>
+              <a:r>
+                <a:rPr lang="ko-KR" altLang="en-US" dirty="0"/>
+                <a:t>이름</a:t>
+              </a:r>
+            </a:p>
+          </p:txBody>
+        </p:sp>
+      </p:grpSp>
+      <p:grpSp>
+        <p:nvGrpSpPr>
+          <p:cNvPr id="24" name="그룹 23">
+            <a:extLst>
+              <a:ext uri="{FF2B5EF4-FFF2-40B4-BE49-F238E27FC236}">
+                <a16:creationId xmlns:a16="http://schemas.microsoft.com/office/drawing/2014/main" id="{8480B8EF-65D0-4B66-9117-52F0354A2B4C}"/>
+              </a:ext>
+            </a:extLst>
+          </p:cNvPr>
+          <p:cNvGrpSpPr/>
+          <p:nvPr/>
+        </p:nvGrpSpPr>
+        <p:grpSpPr>
+          <a:xfrm>
+            <a:off x="2682728" y="3702843"/>
+            <a:ext cx="6791471" cy="731120"/>
+            <a:chOff x="4495704" y="2546911"/>
+            <a:chExt cx="2544057" cy="779846"/>
+          </a:xfrm>
+        </p:grpSpPr>
+        <p:sp>
+          <p:nvSpPr>
+            <p:cNvPr id="25" name="직사각형 24">
+              <a:extLst>
+                <a:ext uri="{FF2B5EF4-FFF2-40B4-BE49-F238E27FC236}">
+                  <a16:creationId xmlns:a16="http://schemas.microsoft.com/office/drawing/2014/main" id="{22E10BA9-19DA-46ED-8F14-06CFA7D3DDCA}"/>
+                </a:ext>
+              </a:extLst>
+            </p:cNvPr>
+            <p:cNvSpPr/>
+            <p:nvPr/>
+          </p:nvSpPr>
+          <p:spPr>
+            <a:xfrm>
+              <a:off x="4808556" y="2546911"/>
+              <a:ext cx="2231205" cy="779846"/>
+            </a:xfrm>
+            <a:prstGeom prst="rect">
+              <a:avLst/>
+            </a:prstGeom>
+            <a:scene3d>
+              <a:camera prst="orthographicFront"/>
+              <a:lightRig rig="threePt" dir="t"/>
+            </a:scene3d>
+            <a:sp3d>
+              <a:bevelT prst="relaxedInset"/>
+            </a:sp3d>
+          </p:spPr>
+          <p:style>
+            <a:lnRef idx="2">
+              <a:schemeClr val="dk1"/>
+            </a:lnRef>
+            <a:fillRef idx="1">
+              <a:schemeClr val="lt1"/>
+            </a:fillRef>
+            <a:effectRef idx="0">
+              <a:schemeClr val="dk1"/>
+            </a:effectRef>
+            <a:fontRef idx="minor">
+              <a:schemeClr val="dk1"/>
+            </a:fontRef>
+          </p:style>
+          <p:txBody>
+            <a:bodyPr rtlCol="0" anchor="ctr"/>
+            <a:lstStyle/>
+            <a:p>
+              <a:pPr algn="ctr"/>
+              <a:r>
+                <a:rPr lang="ko-KR" altLang="en-US" dirty="0" err="1"/>
+                <a:t>입력창</a:t>
+              </a:r>
+              <a:endParaRPr lang="ko-KR" altLang="en-US" dirty="0"/>
+            </a:p>
+          </p:txBody>
+        </p:sp>
+        <p:sp>
+          <p:nvSpPr>
+            <p:cNvPr id="26" name="직사각형 25">
+              <a:extLst>
+                <a:ext uri="{FF2B5EF4-FFF2-40B4-BE49-F238E27FC236}">
+                  <a16:creationId xmlns:a16="http://schemas.microsoft.com/office/drawing/2014/main" id="{F1185513-109F-407C-A887-C58EE22C3DC4}"/>
+                </a:ext>
+              </a:extLst>
+            </p:cNvPr>
+            <p:cNvSpPr/>
+            <p:nvPr/>
+          </p:nvSpPr>
+          <p:spPr>
+            <a:xfrm>
+              <a:off x="4495704" y="2760798"/>
+              <a:ext cx="318744" cy="360727"/>
+            </a:xfrm>
+            <a:prstGeom prst="rect">
+              <a:avLst/>
+            </a:prstGeom>
+            <a:noFill/>
+            <a:ln>
+              <a:noFill/>
+            </a:ln>
+          </p:spPr>
+          <p:style>
+            <a:lnRef idx="0">
+              <a:scrgbClr r="0" g="0" b="0"/>
+            </a:lnRef>
+            <a:fillRef idx="0">
+              <a:scrgbClr r="0" g="0" b="0"/>
+            </a:fillRef>
+            <a:effectRef idx="0">
+              <a:scrgbClr r="0" g="0" b="0"/>
+            </a:effectRef>
+            <a:fontRef idx="minor">
+              <a:schemeClr val="dk1"/>
+            </a:fontRef>
+          </p:style>
+          <p:txBody>
+            <a:bodyPr rtlCol="0" anchor="ctr"/>
+            <a:lstStyle/>
+            <a:p>
+              <a:pPr algn="ctr"/>
+              <a:r>
+                <a:rPr lang="ko-KR" altLang="en-US" dirty="0"/>
+                <a:t>본문</a:t>
+              </a:r>
+            </a:p>
+          </p:txBody>
+        </p:sp>
+      </p:grpSp>
+      <p:grpSp>
+        <p:nvGrpSpPr>
+          <p:cNvPr id="27" name="그룹 26">
+            <a:extLst>
+              <a:ext uri="{FF2B5EF4-FFF2-40B4-BE49-F238E27FC236}">
+                <a16:creationId xmlns:a16="http://schemas.microsoft.com/office/drawing/2014/main" id="{82D51DB6-7C94-47E5-B6FE-E54FF9A37CC5}"/>
+              </a:ext>
+            </a:extLst>
+          </p:cNvPr>
+          <p:cNvGrpSpPr/>
+          <p:nvPr/>
+        </p:nvGrpSpPr>
+        <p:grpSpPr>
+          <a:xfrm>
+            <a:off x="3512615" y="4515983"/>
+            <a:ext cx="5961585" cy="379602"/>
+            <a:chOff x="4487549" y="2546911"/>
+            <a:chExt cx="2552212" cy="379602"/>
+          </a:xfrm>
+        </p:grpSpPr>
+        <p:sp>
+          <p:nvSpPr>
+            <p:cNvPr id="28" name="직사각형 27">
+              <a:extLst>
+                <a:ext uri="{FF2B5EF4-FFF2-40B4-BE49-F238E27FC236}">
+                  <a16:creationId xmlns:a16="http://schemas.microsoft.com/office/drawing/2014/main" id="{E165F9C5-9ED4-4465-872E-F9750E4958AB}"/>
+                </a:ext>
+              </a:extLst>
+            </p:cNvPr>
+            <p:cNvSpPr/>
+            <p:nvPr/>
+          </p:nvSpPr>
+          <p:spPr>
+            <a:xfrm>
+              <a:off x="4487549" y="2546911"/>
+              <a:ext cx="2552212" cy="379602"/>
+            </a:xfrm>
+            <a:prstGeom prst="rect">
+              <a:avLst/>
+            </a:prstGeom>
+            <a:scene3d>
+              <a:camera prst="orthographicFront"/>
+              <a:lightRig rig="threePt" dir="t"/>
+            </a:scene3d>
+            <a:sp3d>
+              <a:bevelT prst="relaxedInset"/>
+            </a:sp3d>
+          </p:spPr>
+          <p:style>
+            <a:lnRef idx="2">
+              <a:schemeClr val="dk1"/>
+            </a:lnRef>
+            <a:fillRef idx="1">
+              <a:schemeClr val="lt1"/>
+            </a:fillRef>
+            <a:effectRef idx="0">
+              <a:schemeClr val="dk1"/>
+            </a:effectRef>
+            <a:fontRef idx="minor">
+              <a:schemeClr val="dk1"/>
+            </a:fontRef>
+          </p:style>
+          <p:txBody>
+            <a:bodyPr rtlCol="0" anchor="ctr"/>
+            <a:lstStyle/>
+            <a:p>
+              <a:pPr algn="ctr"/>
+              <a:r>
+                <a:rPr lang="ko-KR" altLang="en-US" dirty="0" err="1"/>
+                <a:t>입력창</a:t>
+              </a:r>
+              <a:endParaRPr lang="ko-KR" altLang="en-US" dirty="0"/>
+            </a:p>
+          </p:txBody>
+        </p:sp>
+        <p:sp>
+          <p:nvSpPr>
+            <p:cNvPr id="29" name="직사각형 28">
+              <a:extLst>
+                <a:ext uri="{FF2B5EF4-FFF2-40B4-BE49-F238E27FC236}">
+                  <a16:creationId xmlns:a16="http://schemas.microsoft.com/office/drawing/2014/main" id="{B4FF4E17-7BFB-46CF-82DE-49F230FB1FC9}"/>
+                </a:ext>
+              </a:extLst>
+            </p:cNvPr>
+            <p:cNvSpPr/>
+            <p:nvPr/>
+          </p:nvSpPr>
+          <p:spPr>
+            <a:xfrm>
+              <a:off x="4489812" y="2556349"/>
+              <a:ext cx="654342" cy="360727"/>
+            </a:xfrm>
+            <a:prstGeom prst="rect">
+              <a:avLst/>
+            </a:prstGeom>
+            <a:noFill/>
+            <a:ln>
+              <a:noFill/>
+            </a:ln>
+          </p:spPr>
+          <p:style>
+            <a:lnRef idx="0">
+              <a:scrgbClr r="0" g="0" b="0"/>
+            </a:lnRef>
+            <a:fillRef idx="0">
+              <a:scrgbClr r="0" g="0" b="0"/>
+            </a:fillRef>
+            <a:effectRef idx="0">
+              <a:scrgbClr r="0" g="0" b="0"/>
+            </a:effectRef>
+            <a:fontRef idx="minor">
+              <a:schemeClr val="dk1"/>
+            </a:fontRef>
+          </p:style>
+          <p:txBody>
+            <a:bodyPr rtlCol="0" anchor="ctr"/>
+            <a:lstStyle/>
+            <a:p>
+              <a:pPr algn="ctr"/>
+              <a:endParaRPr lang="ko-KR" altLang="en-US" dirty="0"/>
+            </a:p>
+          </p:txBody>
+        </p:sp>
+      </p:grpSp>
+      <p:sp>
+        <p:nvSpPr>
+          <p:cNvPr id="30" name="타원 29">
+            <a:extLst>
+              <a:ext uri="{FF2B5EF4-FFF2-40B4-BE49-F238E27FC236}">
+                <a16:creationId xmlns:a16="http://schemas.microsoft.com/office/drawing/2014/main" id="{80296C1E-F7FA-4D1D-AEB0-596FA10BD454}"/>
+              </a:ext>
+            </a:extLst>
+          </p:cNvPr>
+          <p:cNvSpPr/>
+          <p:nvPr/>
+        </p:nvSpPr>
+        <p:spPr>
+          <a:xfrm>
+            <a:off x="5849261" y="5581097"/>
+            <a:ext cx="142613" cy="142613"/>
+          </a:xfrm>
+          <a:prstGeom prst="ellipse">
+            <a:avLst/>
+          </a:prstGeom>
+        </p:spPr>
+        <p:style>
+          <a:lnRef idx="2">
+            <a:schemeClr val="dk1">
+              <a:shade val="50000"/>
+            </a:schemeClr>
+          </a:lnRef>
+          <a:fillRef idx="1">
+            <a:schemeClr val="dk1"/>
+          </a:fillRef>
+          <a:effectRef idx="0">
+            <a:schemeClr val="dk1"/>
+          </a:effectRef>
+          <a:fontRef idx="minor">
+            <a:schemeClr val="lt1"/>
+          </a:fontRef>
+        </p:style>
+        <p:txBody>
+          <a:bodyPr rtlCol="0" anchor="ctr"/>
+          <a:lstStyle/>
+          <a:p>
+            <a:pPr algn="ctr"/>
+            <a:endParaRPr lang="ko-KR" altLang="en-US"/>
+          </a:p>
+        </p:txBody>
+      </p:sp>
+      <p:sp>
+        <p:nvSpPr>
+          <p:cNvPr id="31" name="타원 30">
+            <a:extLst>
+              <a:ext uri="{FF2B5EF4-FFF2-40B4-BE49-F238E27FC236}">
+                <a16:creationId xmlns:a16="http://schemas.microsoft.com/office/drawing/2014/main" id="{64A768F7-51A5-4575-B82C-5897FF7492FF}"/>
+              </a:ext>
+            </a:extLst>
+          </p:cNvPr>
+          <p:cNvSpPr/>
+          <p:nvPr/>
+        </p:nvSpPr>
+        <p:spPr>
+          <a:xfrm>
+            <a:off x="5849262" y="5781886"/>
+            <a:ext cx="142612" cy="142612"/>
+          </a:xfrm>
+          <a:prstGeom prst="ellipse">
+            <a:avLst/>
+          </a:prstGeom>
+        </p:spPr>
+        <p:style>
+          <a:lnRef idx="2">
+            <a:schemeClr val="dk1">
+              <a:shade val="50000"/>
+            </a:schemeClr>
+          </a:lnRef>
+          <a:fillRef idx="1">
+            <a:schemeClr val="dk1"/>
+          </a:fillRef>
+          <a:effectRef idx="0">
+            <a:schemeClr val="dk1"/>
+          </a:effectRef>
+          <a:fontRef idx="minor">
+            <a:schemeClr val="lt1"/>
+          </a:fontRef>
+        </p:style>
+        <p:txBody>
+          <a:bodyPr rtlCol="0" anchor="ctr"/>
+          <a:lstStyle/>
+          <a:p>
+            <a:pPr algn="ctr"/>
+            <a:endParaRPr lang="ko-KR" altLang="en-US"/>
+          </a:p>
+        </p:txBody>
+      </p:sp>
+      <p:sp>
+        <p:nvSpPr>
+          <p:cNvPr id="32" name="사각형: 둥근 모서리 31">
+            <a:extLst>
+              <a:ext uri="{FF2B5EF4-FFF2-40B4-BE49-F238E27FC236}">
+                <a16:creationId xmlns:a16="http://schemas.microsoft.com/office/drawing/2014/main" id="{10CD6716-FAC3-4812-BBFC-9F6738738A9D}"/>
+              </a:ext>
+            </a:extLst>
+          </p:cNvPr>
+          <p:cNvSpPr/>
+          <p:nvPr/>
+        </p:nvSpPr>
+        <p:spPr>
+          <a:xfrm>
+            <a:off x="2578649" y="5159063"/>
+            <a:ext cx="1059061" cy="332151"/>
+          </a:xfrm>
+          <a:prstGeom prst="roundRect">
+            <a:avLst/>
+          </a:prstGeom>
+          <a:scene3d>
+            <a:camera prst="orthographicFront"/>
+            <a:lightRig rig="threePt" dir="t"/>
+          </a:scene3d>
+          <a:sp3d>
+            <a:bevelT/>
+          </a:sp3d>
+        </p:spPr>
+        <p:style>
+          <a:lnRef idx="2">
+            <a:schemeClr val="dk1"/>
+          </a:lnRef>
+          <a:fillRef idx="1">
+            <a:schemeClr val="lt1"/>
+          </a:fillRef>
+          <a:effectRef idx="0">
+            <a:schemeClr val="dk1"/>
+          </a:effectRef>
+          <a:fontRef idx="minor">
+            <a:schemeClr val="dk1"/>
+          </a:fontRef>
+        </p:style>
+        <p:txBody>
+          <a:bodyPr rtlCol="0" anchor="ctr"/>
+          <a:lstStyle/>
+          <a:p>
+            <a:pPr algn="ctr"/>
+            <a:r>
+              <a:rPr lang="ko-KR" altLang="en-US" dirty="0"/>
+              <a:t>첨부</a:t>
+            </a:r>
+          </a:p>
+        </p:txBody>
+      </p:sp>
+      <p:sp>
+        <p:nvSpPr>
+          <p:cNvPr id="33" name="직사각형 32">
+            <a:extLst>
+              <a:ext uri="{FF2B5EF4-FFF2-40B4-BE49-F238E27FC236}">
+                <a16:creationId xmlns:a16="http://schemas.microsoft.com/office/drawing/2014/main" id="{EAC8A468-FC8D-4082-BB6A-78DB9429E5C9}"/>
+              </a:ext>
+            </a:extLst>
+          </p:cNvPr>
+          <p:cNvSpPr/>
+          <p:nvPr/>
+        </p:nvSpPr>
+        <p:spPr>
+          <a:xfrm>
+            <a:off x="2781009" y="4530140"/>
+            <a:ext cx="654342" cy="360727"/>
+          </a:xfrm>
+          <a:prstGeom prst="rect">
+            <a:avLst/>
+          </a:prstGeom>
+          <a:noFill/>
+          <a:ln>
+            <a:noFill/>
+          </a:ln>
+        </p:spPr>
+        <p:style>
+          <a:lnRef idx="0">
+            <a:scrgbClr r="0" g="0" b="0"/>
+          </a:lnRef>
+          <a:fillRef idx="0">
+            <a:scrgbClr r="0" g="0" b="0"/>
+          </a:fillRef>
+          <a:effectRef idx="0">
+            <a:scrgbClr r="0" g="0" b="0"/>
+          </a:effectRef>
+          <a:fontRef idx="minor">
+            <a:schemeClr val="dk1"/>
+          </a:fontRef>
+        </p:style>
+        <p:txBody>
+          <a:bodyPr rtlCol="0" anchor="ctr"/>
+          <a:lstStyle/>
+          <a:p>
+            <a:pPr algn="ctr"/>
+            <a:r>
+              <a:rPr lang="ko-KR" altLang="en-US" dirty="0"/>
+              <a:t>태그</a:t>
+            </a:r>
+          </a:p>
+        </p:txBody>
+      </p:sp>
+      <p:sp>
+        <p:nvSpPr>
+          <p:cNvPr id="34" name="직사각형 33">
+            <a:extLst>
+              <a:ext uri="{FF2B5EF4-FFF2-40B4-BE49-F238E27FC236}">
+                <a16:creationId xmlns:a16="http://schemas.microsoft.com/office/drawing/2014/main" id="{C0863270-6F9C-4E5F-8879-05E9EFECD2B0}"/>
+              </a:ext>
+            </a:extLst>
+          </p:cNvPr>
+          <p:cNvSpPr/>
+          <p:nvPr/>
+        </p:nvSpPr>
+        <p:spPr>
+          <a:xfrm>
+            <a:off x="3711610" y="5122047"/>
+            <a:ext cx="5762590" cy="400874"/>
+          </a:xfrm>
+          <a:prstGeom prst="rect">
+            <a:avLst/>
+          </a:prstGeom>
+        </p:spPr>
+        <p:style>
+          <a:lnRef idx="2">
+            <a:schemeClr val="dk1"/>
+          </a:lnRef>
+          <a:fillRef idx="1">
+            <a:schemeClr val="lt1"/>
+          </a:fillRef>
+          <a:effectRef idx="0">
+            <a:schemeClr val="dk1"/>
+          </a:effectRef>
+          <a:fontRef idx="minor">
+            <a:schemeClr val="dk1"/>
+          </a:fontRef>
+        </p:style>
+        <p:txBody>
+          <a:bodyPr rtlCol="0" anchor="ctr"/>
+          <a:lstStyle/>
+          <a:p>
+            <a:pPr algn="ctr"/>
+            <a:r>
+              <a:rPr lang="ko-KR" altLang="en-US" dirty="0"/>
+              <a:t>첨부파일 정보</a:t>
+            </a:r>
+          </a:p>
+        </p:txBody>
+      </p:sp>
+      <p:grpSp>
+        <p:nvGrpSpPr>
+          <p:cNvPr id="35" name="그룹 34">
+            <a:extLst>
+              <a:ext uri="{FF2B5EF4-FFF2-40B4-BE49-F238E27FC236}">
+                <a16:creationId xmlns:a16="http://schemas.microsoft.com/office/drawing/2014/main" id="{9D5F5A39-A67D-4F4D-914C-781EB32D677C}"/>
+              </a:ext>
+            </a:extLst>
+          </p:cNvPr>
+          <p:cNvGrpSpPr/>
+          <p:nvPr/>
+        </p:nvGrpSpPr>
+        <p:grpSpPr>
+          <a:xfrm>
+            <a:off x="2666999" y="3277182"/>
+            <a:ext cx="6807200" cy="355884"/>
+            <a:chOff x="4489812" y="2546911"/>
+            <a:chExt cx="2549949" cy="379602"/>
+          </a:xfrm>
+        </p:grpSpPr>
+        <p:sp>
+          <p:nvSpPr>
+            <p:cNvPr id="36" name="직사각형 35">
+              <a:extLst>
+                <a:ext uri="{FF2B5EF4-FFF2-40B4-BE49-F238E27FC236}">
+                  <a16:creationId xmlns:a16="http://schemas.microsoft.com/office/drawing/2014/main" id="{6190D3BF-D5B5-4E27-876F-DE61EF03642D}"/>
+                </a:ext>
+              </a:extLst>
+            </p:cNvPr>
+            <p:cNvSpPr/>
+            <p:nvPr/>
+          </p:nvSpPr>
+          <p:spPr>
+            <a:xfrm>
+              <a:off x="4808556" y="2546911"/>
+              <a:ext cx="2231205" cy="379602"/>
+            </a:xfrm>
+            <a:prstGeom prst="rect">
+              <a:avLst/>
+            </a:prstGeom>
+            <a:scene3d>
+              <a:camera prst="orthographicFront"/>
+              <a:lightRig rig="threePt" dir="t"/>
+            </a:scene3d>
+            <a:sp3d>
+              <a:bevelT prst="relaxedInset"/>
+            </a:sp3d>
+          </p:spPr>
+          <p:style>
+            <a:lnRef idx="2">
+              <a:schemeClr val="dk1"/>
+            </a:lnRef>
+            <a:fillRef idx="1">
+              <a:schemeClr val="lt1"/>
+            </a:fillRef>
+            <a:effectRef idx="0">
+              <a:schemeClr val="dk1"/>
+            </a:effectRef>
+            <a:fontRef idx="minor">
+              <a:schemeClr val="dk1"/>
+            </a:fontRef>
+          </p:style>
+          <p:txBody>
+            <a:bodyPr rtlCol="0" anchor="ctr"/>
+            <a:lstStyle/>
+            <a:p>
+              <a:pPr algn="ctr"/>
+              <a:r>
+                <a:rPr lang="ko-KR" altLang="en-US" dirty="0" err="1"/>
+                <a:t>입력창</a:t>
+              </a:r>
+              <a:endParaRPr lang="ko-KR" altLang="en-US" dirty="0"/>
+            </a:p>
+          </p:txBody>
+        </p:sp>
+        <p:sp>
+          <p:nvSpPr>
+            <p:cNvPr id="37" name="직사각형 36">
+              <a:extLst>
+                <a:ext uri="{FF2B5EF4-FFF2-40B4-BE49-F238E27FC236}">
+                  <a16:creationId xmlns:a16="http://schemas.microsoft.com/office/drawing/2014/main" id="{7806A15A-E2F0-4AE6-A268-D506C790427B}"/>
+                </a:ext>
+              </a:extLst>
+            </p:cNvPr>
+            <p:cNvSpPr/>
+            <p:nvPr/>
+          </p:nvSpPr>
+          <p:spPr>
+            <a:xfrm>
+              <a:off x="4489812" y="2556349"/>
+              <a:ext cx="318744" cy="360727"/>
+            </a:xfrm>
+            <a:prstGeom prst="rect">
+              <a:avLst/>
+            </a:prstGeom>
+            <a:noFill/>
+            <a:ln>
+              <a:noFill/>
+            </a:ln>
+          </p:spPr>
+          <p:style>
+            <a:lnRef idx="0">
+              <a:scrgbClr r="0" g="0" b="0"/>
+            </a:lnRef>
+            <a:fillRef idx="0">
+              <a:scrgbClr r="0" g="0" b="0"/>
+            </a:fillRef>
+            <a:effectRef idx="0">
+              <a:scrgbClr r="0" g="0" b="0"/>
+            </a:effectRef>
+            <a:fontRef idx="minor">
+              <a:schemeClr val="dk1"/>
+            </a:fontRef>
+          </p:style>
+          <p:txBody>
+            <a:bodyPr rtlCol="0" anchor="ctr"/>
+            <a:lstStyle/>
+            <a:p>
+              <a:pPr algn="ctr"/>
+              <a:r>
+                <a:rPr lang="ko-KR" altLang="en-US" dirty="0"/>
+                <a:t>주소</a:t>
+              </a:r>
+            </a:p>
+          </p:txBody>
+        </p:sp>
+      </p:grpSp>
+    </p:spTree>
+    <p:extLst>
+      <p:ext uri="{BB962C8B-B14F-4D97-AF65-F5344CB8AC3E}">
+        <p14:creationId xmlns:p14="http://schemas.microsoft.com/office/powerpoint/2010/main" val="3021173064"/>
       </p:ext>
     </p:extLst>
   </p:cSld>
